--- a/Presentazione/Presentazione Playwise SwD.pptx
+++ b/Presentazione/Presentazione Playwise SwD.pptx
@@ -137,7 +137,7 @@
       <p15:sldGuideLst xmlns:p15="http://schemas.microsoft.com/office/powerpoint/2012/main"/>
     </p:ext>
     <p:ext uri="GoogleSlidesCustomDataVersion2">
-      <go:slidesCustomData xmlns:mc="http://schemas.openxmlformats.org/markup-compatibility/2006" xmlns:mv="urn:schemas-microsoft-com:mac:vml" xmlns:c="http://schemas.openxmlformats.org/drawingml/2006/chart" xmlns:dgm="http://schemas.openxmlformats.org/drawingml/2006/diagram" xmlns:o="urn:schemas-microsoft-com:office:office" xmlns:v="urn:schemas-microsoft-com:vml" xmlns:pvml="urn:schemas-microsoft-com:office:powerpoint" xmlns:com="http://schemas.openxmlformats.org/drawingml/2006/compatibility" xmlns:p14="http://schemas.microsoft.com/office/powerpoint/2010/main" xmlns:p15="http://schemas.microsoft.com/office/powerpoint/2012/main" xmlns:ahyp="http://schemas.microsoft.com/office/drawing/2018/hyperlinkcolor" xmlns:go="http://customooxmlschemas.google.com/" xmlns="" r:id="rId78" roundtripDataSignature="AMtx7mjVyy5sqcn1Z+qv/5p4qL3jfGJTcQ=="/>
+      <go:slidesCustomData xmlns="" xmlns:go="http://customooxmlschemas.google.com/" xmlns:ahyp="http://schemas.microsoft.com/office/drawing/2018/hyperlinkcolor" xmlns:p15="http://schemas.microsoft.com/office/powerpoint/2012/main" xmlns:p14="http://schemas.microsoft.com/office/powerpoint/2010/main" xmlns:com="http://schemas.openxmlformats.org/drawingml/2006/compatibility" xmlns:pvml="urn:schemas-microsoft-com:office:powerpoint" xmlns:v="urn:schemas-microsoft-com:vml" xmlns:o="urn:schemas-microsoft-com:office:office" xmlns:dgm="http://schemas.openxmlformats.org/drawingml/2006/diagram" xmlns:c="http://schemas.openxmlformats.org/drawingml/2006/chart" xmlns:mv="urn:schemas-microsoft-com:mac:vml" xmlns:mc="http://schemas.openxmlformats.org/markup-compatibility/2006" r:id="rId78" roundtripDataSignature="AMtx7mjVyy5sqcn1Z+qv/5p4qL3jfGJTcQ=="/>
     </p:ext>
   </p:extLst>
 </p:presentation>
@@ -12544,8 +12544,8 @@
         </p:blipFill>
         <p:spPr>
           <a:xfrm>
-            <a:off x="2515406" y="6442871"/>
-            <a:ext cx="7973988" cy="1966127"/>
+            <a:off x="2941461" y="6644687"/>
+            <a:ext cx="6793995" cy="1780353"/>
           </a:xfrm>
           <a:prstGeom prst="rect">
             <a:avLst/>
@@ -12570,8 +12570,8 @@
         </p:nvSpPr>
         <p:spPr>
           <a:xfrm>
-            <a:off x="387209" y="2511613"/>
-            <a:ext cx="11902500" cy="3785611"/>
+            <a:off x="387209" y="2174366"/>
+            <a:ext cx="11902500" cy="4524275"/>
           </a:xfrm>
           <a:prstGeom prst="rect">
             <a:avLst/>
@@ -12830,6 +12830,49 @@
                 <a:sym typeface="Helvetica Neue"/>
               </a:rPr>
               <a:t>igliare nuovi videogiochi in maniera intelligente</a:t>
+            </a:r>
+          </a:p>
+          <a:p>
+            <a:pPr marL="457200" marR="0" lvl="0" indent="-457200" algn="l" rtl="0">
+              <a:lnSpc>
+                <a:spcPct val="200000"/>
+              </a:lnSpc>
+              <a:spcBef>
+                <a:spcPts val="0"/>
+              </a:spcBef>
+              <a:spcAft>
+                <a:spcPts val="0"/>
+              </a:spcAft>
+              <a:buClr>
+                <a:srgbClr val="303030"/>
+              </a:buClr>
+              <a:buSzPts val="2400"/>
+              <a:buFont typeface="Arial"/>
+              <a:buChar char="•"/>
+            </a:pPr>
+            <a:r>
+              <a:rPr lang="it-IT" sz="2400" b="1" i="0" u="none" strike="noStrike" cap="none" dirty="0">
+                <a:solidFill>
+                  <a:srgbClr val="303030"/>
+                </a:solidFill>
+                <a:latin typeface="Helvetica Neue"/>
+                <a:ea typeface="Helvetica Neue"/>
+                <a:cs typeface="Helvetica Neue"/>
+                <a:sym typeface="Helvetica Neue"/>
+              </a:rPr>
+              <a:t>Classi</a:t>
+            </a:r>
+            <a:r>
+              <a:rPr lang="it-IT" sz="2400" b="1" dirty="0">
+                <a:solidFill>
+                  <a:srgbClr val="303030"/>
+                </a:solidFill>
+                <a:latin typeface="Helvetica Neue"/>
+                <a:ea typeface="Helvetica Neue"/>
+                <a:cs typeface="Helvetica Neue"/>
+                <a:sym typeface="Helvetica Neue"/>
+              </a:rPr>
+              <a:t>ficatore PEGI</a:t>
             </a:r>
             <a:endParaRPr lang="it-IT" sz="2400" b="1" i="0" u="none" strike="noStrike" cap="none" dirty="0">
               <a:solidFill>
@@ -14973,8 +15016,8 @@
         </p:nvSpPr>
         <p:spPr>
           <a:xfrm>
-            <a:off x="2569768" y="3213368"/>
-            <a:ext cx="3446021" cy="1998603"/>
+            <a:off x="2569769" y="3213368"/>
+            <a:ext cx="2054082" cy="1998603"/>
           </a:xfrm>
           <a:prstGeom prst="roundRect">
             <a:avLst/>
@@ -15030,8 +15073,8 @@
         </p:blipFill>
         <p:spPr>
           <a:xfrm>
-            <a:off x="2988557" y="3593231"/>
-            <a:ext cx="2481183" cy="1298486"/>
+            <a:off x="2711695" y="3861232"/>
+            <a:ext cx="1765987" cy="924199"/>
           </a:xfrm>
           <a:prstGeom prst="rect">
             <a:avLst/>
@@ -15112,8 +15155,8 @@
         </p:nvSpPr>
         <p:spPr>
           <a:xfrm>
-            <a:off x="4841594" y="5328002"/>
-            <a:ext cx="7324529" cy="2037467"/>
+            <a:off x="4841594" y="3213368"/>
+            <a:ext cx="7324529" cy="4152101"/>
           </a:xfrm>
           <a:prstGeom prst="roundRect">
             <a:avLst/>
@@ -15457,6 +15500,102 @@
           <a:ln>
             <a:noFill/>
           </a:ln>
+        </p:spPr>
+      </p:pic>
+      <p:pic>
+        <p:nvPicPr>
+          <p:cNvPr id="11" name="Elemento grafico 10">
+            <a:extLst>
+              <a:ext uri="{FF2B5EF4-FFF2-40B4-BE49-F238E27FC236}">
+                <a16:creationId xmlns:a16="http://schemas.microsoft.com/office/drawing/2014/main" id="{BE7F469E-FD7F-7D40-BD60-3136C5A41349}"/>
+              </a:ext>
+            </a:extLst>
+          </p:cNvPr>
+          <p:cNvPicPr>
+            <a:picLocks noChangeAspect="1"/>
+          </p:cNvPicPr>
+          <p:nvPr/>
+        </p:nvPicPr>
+        <p:blipFill>
+          <a:blip r:embed="rId10">
+            <a:extLst>
+              <a:ext uri="{96DAC541-7B7A-43D3-8B79-37D633B846F1}">
+                <asvg:svgBlip xmlns:asvg="http://schemas.microsoft.com/office/drawing/2016/SVG/main" r:embed="rId11"/>
+              </a:ext>
+            </a:extLst>
+          </a:blip>
+          <a:stretch>
+            <a:fillRect/>
+          </a:stretch>
+        </p:blipFill>
+        <p:spPr>
+          <a:xfrm>
+            <a:off x="5166651" y="3213368"/>
+            <a:ext cx="1998604" cy="1998604"/>
+          </a:xfrm>
+          <a:prstGeom prst="rect">
+            <a:avLst/>
+          </a:prstGeom>
+        </p:spPr>
+      </p:pic>
+      <p:pic>
+        <p:nvPicPr>
+          <p:cNvPr id="13" name="Immagine 12" descr="Immagine che contiene Elementi grafici, simbolo, clipart, logo&#10;&#10;Il contenuto generato dall'IA potrebbe non essere corretto.">
+            <a:extLst>
+              <a:ext uri="{FF2B5EF4-FFF2-40B4-BE49-F238E27FC236}">
+                <a16:creationId xmlns:a16="http://schemas.microsoft.com/office/drawing/2014/main" id="{0485F1F0-F484-BE48-DCF4-A16292079E36}"/>
+              </a:ext>
+            </a:extLst>
+          </p:cNvPr>
+          <p:cNvPicPr>
+            <a:picLocks noChangeAspect="1"/>
+          </p:cNvPicPr>
+          <p:nvPr/>
+        </p:nvPicPr>
+        <p:blipFill>
+          <a:blip r:embed="rId12"/>
+          <a:stretch>
+            <a:fillRect/>
+          </a:stretch>
+        </p:blipFill>
+        <p:spPr>
+          <a:xfrm>
+            <a:off x="7504556" y="3368262"/>
+            <a:ext cx="1998604" cy="1998604"/>
+          </a:xfrm>
+          <a:prstGeom prst="rect">
+            <a:avLst/>
+          </a:prstGeom>
+        </p:spPr>
+      </p:pic>
+      <p:pic>
+        <p:nvPicPr>
+          <p:cNvPr id="17" name="Immagine 16" descr="Immagine che contiene clipart, Elementi grafici, cartone animato, illustrazione&#10;&#10;Il contenuto generato dall'IA potrebbe non essere corretto.">
+            <a:extLst>
+              <a:ext uri="{FF2B5EF4-FFF2-40B4-BE49-F238E27FC236}">
+                <a16:creationId xmlns:a16="http://schemas.microsoft.com/office/drawing/2014/main" id="{23EB4627-E0C2-005E-05B9-2397C8082ED1}"/>
+              </a:ext>
+            </a:extLst>
+          </p:cNvPr>
+          <p:cNvPicPr>
+            <a:picLocks noChangeAspect="1"/>
+          </p:cNvPicPr>
+          <p:nvPr/>
+        </p:nvPicPr>
+        <p:blipFill>
+          <a:blip r:embed="rId13"/>
+          <a:stretch>
+            <a:fillRect/>
+          </a:stretch>
+        </p:blipFill>
+        <p:spPr>
+          <a:xfrm>
+            <a:off x="10021841" y="3591947"/>
+            <a:ext cx="1625600" cy="1625600"/>
+          </a:xfrm>
+          <a:prstGeom prst="rect">
+            <a:avLst/>
+          </a:prstGeom>
         </p:spPr>
       </p:pic>
     </p:spTree>

--- a/Presentazione/Presentazione Playwise SwD.pptx
+++ b/Presentazione/Presentazione Playwise SwD.pptx
@@ -5,36 +5,38 @@
     <p:sldMasterId id="2147483732" r:id="rId1"/>
   </p:sldMasterIdLst>
   <p:notesMasterIdLst>
-    <p:notesMasterId r:id="rId7"/>
+    <p:notesMasterId r:id="rId9"/>
   </p:notesMasterIdLst>
   <p:sldIdLst>
     <p:sldId id="256" r:id="rId2"/>
     <p:sldId id="349" r:id="rId3"/>
     <p:sldId id="299" r:id="rId4"/>
-    <p:sldId id="311" r:id="rId5"/>
-    <p:sldId id="298" r:id="rId6"/>
+    <p:sldId id="350" r:id="rId5"/>
+    <p:sldId id="351" r:id="rId6"/>
+    <p:sldId id="352" r:id="rId7"/>
+    <p:sldId id="298" r:id="rId8"/>
   </p:sldIdLst>
   <p:sldSz cx="13004800" cy="9753600"/>
   <p:notesSz cx="6858000" cy="9144000"/>
   <p:embeddedFontLst>
     <p:embeddedFont>
       <p:font typeface="Helvetica Neue" panose="02000503000000020004" pitchFamily="2" charset="0"/>
-      <p:regular r:id="rId8"/>
-      <p:bold r:id="rId9"/>
-      <p:italic r:id="rId10"/>
-      <p:boldItalic r:id="rId11"/>
+      <p:regular r:id="rId10"/>
+      <p:bold r:id="rId11"/>
+      <p:italic r:id="rId12"/>
+      <p:boldItalic r:id="rId13"/>
     </p:embeddedFont>
     <p:embeddedFont>
       <p:font typeface="Merriweather Sans" pitchFamily="2" charset="77"/>
-      <p:regular r:id="rId12"/>
-      <p:bold r:id="rId13"/>
-      <p:italic r:id="rId14"/>
-      <p:boldItalic r:id="rId15"/>
+      <p:regular r:id="rId14"/>
+      <p:bold r:id="rId15"/>
+      <p:italic r:id="rId16"/>
+      <p:boldItalic r:id="rId17"/>
     </p:embeddedFont>
     <p:embeddedFont>
       <p:font typeface="Play" pitchFamily="2" charset="0"/>
-      <p:regular r:id="rId16"/>
-      <p:bold r:id="rId17"/>
+      <p:regular r:id="rId18"/>
+      <p:bold r:id="rId19"/>
     </p:embeddedFont>
   </p:embeddedFontLst>
   <p:defaultTextStyle>
@@ -137,7 +139,7 @@
       <p15:sldGuideLst xmlns:p15="http://schemas.microsoft.com/office/powerpoint/2012/main"/>
     </p:ext>
     <p:ext uri="GoogleSlidesCustomDataVersion2">
-      <go:slidesCustomData xmlns="" xmlns:go="http://customooxmlschemas.google.com/" xmlns:ahyp="http://schemas.microsoft.com/office/drawing/2018/hyperlinkcolor" xmlns:p15="http://schemas.microsoft.com/office/powerpoint/2012/main" xmlns:p14="http://schemas.microsoft.com/office/powerpoint/2010/main" xmlns:com="http://schemas.openxmlformats.org/drawingml/2006/compatibility" xmlns:pvml="urn:schemas-microsoft-com:office:powerpoint" xmlns:v="urn:schemas-microsoft-com:vml" xmlns:o="urn:schemas-microsoft-com:office:office" xmlns:dgm="http://schemas.openxmlformats.org/drawingml/2006/diagram" xmlns:c="http://schemas.openxmlformats.org/drawingml/2006/chart" xmlns:mv="urn:schemas-microsoft-com:mac:vml" xmlns:mc="http://schemas.openxmlformats.org/markup-compatibility/2006" r:id="rId78" roundtripDataSignature="AMtx7mjVyy5sqcn1Z+qv/5p4qL3jfGJTcQ=="/>
+      <go:slidesCustomData xmlns:mc="http://schemas.openxmlformats.org/markup-compatibility/2006" xmlns:mv="urn:schemas-microsoft-com:mac:vml" xmlns:c="http://schemas.openxmlformats.org/drawingml/2006/chart" xmlns:dgm="http://schemas.openxmlformats.org/drawingml/2006/diagram" xmlns:o="urn:schemas-microsoft-com:office:office" xmlns:v="urn:schemas-microsoft-com:vml" xmlns:pvml="urn:schemas-microsoft-com:office:powerpoint" xmlns:com="http://schemas.openxmlformats.org/drawingml/2006/compatibility" xmlns:p14="http://schemas.microsoft.com/office/powerpoint/2010/main" xmlns:p15="http://schemas.microsoft.com/office/powerpoint/2012/main" xmlns:ahyp="http://schemas.microsoft.com/office/drawing/2018/hyperlinkcolor" xmlns:go="http://customooxmlschemas.google.com/" xmlns="" r:id="rId78" roundtripDataSignature="AMtx7mjVyy5sqcn1Z+qv/5p4qL3jfGJTcQ=="/>
     </p:ext>
   </p:extLst>
 </p:presentation>
@@ -7389,7 +7391,7 @@
         <p:cNvPr id="1" name="Shape 125">
           <a:extLst>
             <a:ext uri="{FF2B5EF4-FFF2-40B4-BE49-F238E27FC236}">
-              <a16:creationId xmlns:a16="http://schemas.microsoft.com/office/drawing/2014/main" id="{DC1B6F4A-80F9-42DD-00B1-F7429B44A549}"/>
+              <a16:creationId xmlns:a16="http://schemas.microsoft.com/office/drawing/2014/main" id="{0B369EEC-4699-B33D-A873-40DF3336E970}"/>
             </a:ext>
           </a:extLst>
         </p:cNvPr>
@@ -7409,7 +7411,7 @@
           <p:cNvPr id="126" name="Google Shape;126;p3:notes">
             <a:extLst>
               <a:ext uri="{FF2B5EF4-FFF2-40B4-BE49-F238E27FC236}">
-                <a16:creationId xmlns:a16="http://schemas.microsoft.com/office/drawing/2014/main" id="{0A387F41-2074-F98E-E5D8-076434428418}"/>
+                <a16:creationId xmlns:a16="http://schemas.microsoft.com/office/drawing/2014/main" id="{39856CF3-2493-ECFD-C7E5-A017B1465706}"/>
               </a:ext>
             </a:extLst>
           </p:cNvPr>
@@ -7453,7 +7455,7 @@
           <p:cNvPr id="127" name="Google Shape;127;p3:notes">
             <a:extLst>
               <a:ext uri="{FF2B5EF4-FFF2-40B4-BE49-F238E27FC236}">
-                <a16:creationId xmlns:a16="http://schemas.microsoft.com/office/drawing/2014/main" id="{DD705705-483A-1770-EEB8-267451788438}"/>
+                <a16:creationId xmlns:a16="http://schemas.microsoft.com/office/drawing/2014/main" id="{4573DB9F-472A-AB84-F8E7-1894383EEAA5}"/>
               </a:ext>
             </a:extLst>
           </p:cNvPr>
@@ -7498,7 +7500,7 @@
     </p:spTree>
     <p:extLst>
       <p:ext uri="{BB962C8B-B14F-4D97-AF65-F5344CB8AC3E}">
-        <p14:creationId xmlns:p14="http://schemas.microsoft.com/office/powerpoint/2010/main" val="1758567786"/>
+        <p14:creationId xmlns:p14="http://schemas.microsoft.com/office/powerpoint/2010/main" val="973329854"/>
       </p:ext>
     </p:extLst>
   </p:cSld>
@@ -7509,6 +7511,260 @@
 </file>
 
 <file path=ppt/notesSlides/notesSlide5.xml><?xml version="1.0" encoding="utf-8"?>
+<p:notes xmlns:a="http://schemas.openxmlformats.org/drawingml/2006/main" xmlns:r="http://schemas.openxmlformats.org/officeDocument/2006/relationships" xmlns:p="http://schemas.openxmlformats.org/presentationml/2006/main" showMasterSp="0" showMasterPhAnim="0">
+  <p:cSld>
+    <p:spTree>
+      <p:nvGrpSpPr>
+        <p:cNvPr id="1" name="Shape 125">
+          <a:extLst>
+            <a:ext uri="{FF2B5EF4-FFF2-40B4-BE49-F238E27FC236}">
+              <a16:creationId xmlns:a16="http://schemas.microsoft.com/office/drawing/2014/main" id="{FBDB9149-5E13-182B-3694-B152B7EA4753}"/>
+            </a:ext>
+          </a:extLst>
+        </p:cNvPr>
+        <p:cNvGrpSpPr/>
+        <p:nvPr/>
+      </p:nvGrpSpPr>
+      <p:grpSpPr>
+        <a:xfrm>
+          <a:off x="0" y="0"/>
+          <a:ext cx="0" cy="0"/>
+          <a:chOff x="0" y="0"/>
+          <a:chExt cx="0" cy="0"/>
+        </a:xfrm>
+      </p:grpSpPr>
+      <p:sp>
+        <p:nvSpPr>
+          <p:cNvPr id="126" name="Google Shape;126;p3:notes">
+            <a:extLst>
+              <a:ext uri="{FF2B5EF4-FFF2-40B4-BE49-F238E27FC236}">
+                <a16:creationId xmlns:a16="http://schemas.microsoft.com/office/drawing/2014/main" id="{311B6A72-3072-5EAD-F647-1955EA17EB0E}"/>
+              </a:ext>
+            </a:extLst>
+          </p:cNvPr>
+          <p:cNvSpPr txBox="1">
+            <a:spLocks noGrp="1"/>
+          </p:cNvSpPr>
+          <p:nvPr>
+            <p:ph type="body" idx="1"/>
+          </p:nvPr>
+        </p:nvSpPr>
+        <p:spPr>
+          <a:xfrm>
+            <a:off x="914400" y="4343400"/>
+            <a:ext cx="5029200" cy="4114800"/>
+          </a:xfrm>
+          <a:prstGeom prst="rect">
+            <a:avLst/>
+          </a:prstGeom>
+        </p:spPr>
+        <p:txBody>
+          <a:bodyPr spcFirstLastPara="1" wrap="square" lIns="91425" tIns="45700" rIns="91425" bIns="45700" anchor="t" anchorCtr="0">
+            <a:noAutofit/>
+          </a:bodyPr>
+          <a:lstStyle/>
+          <a:p>
+            <a:pPr marL="0" lvl="0" indent="0" algn="l" rtl="0">
+              <a:spcBef>
+                <a:spcPts val="0"/>
+              </a:spcBef>
+              <a:spcAft>
+                <a:spcPts val="0"/>
+              </a:spcAft>
+              <a:buNone/>
+            </a:pPr>
+            <a:endParaRPr/>
+          </a:p>
+        </p:txBody>
+      </p:sp>
+      <p:sp>
+        <p:nvSpPr>
+          <p:cNvPr id="127" name="Google Shape;127;p3:notes">
+            <a:extLst>
+              <a:ext uri="{FF2B5EF4-FFF2-40B4-BE49-F238E27FC236}">
+                <a16:creationId xmlns:a16="http://schemas.microsoft.com/office/drawing/2014/main" id="{81A5A3ED-5719-7C30-7397-E2999F5B46EC}"/>
+              </a:ext>
+            </a:extLst>
+          </p:cNvPr>
+          <p:cNvSpPr>
+            <a:spLocks noGrp="1" noRot="1" noChangeAspect="1"/>
+          </p:cNvSpPr>
+          <p:nvPr>
+            <p:ph type="sldImg" idx="2"/>
+          </p:nvPr>
+        </p:nvSpPr>
+        <p:spPr>
+          <a:xfrm>
+            <a:off x="1143000" y="685800"/>
+            <a:ext cx="4572000" cy="3429000"/>
+          </a:xfrm>
+          <a:custGeom>
+            <a:avLst/>
+            <a:gdLst/>
+            <a:ahLst/>
+            <a:cxnLst/>
+            <a:rect l="l" t="t" r="r" b="b"/>
+            <a:pathLst>
+              <a:path w="120000" h="120000" extrusionOk="0">
+                <a:moveTo>
+                  <a:pt x="0" y="0"/>
+                </a:moveTo>
+                <a:lnTo>
+                  <a:pt x="120000" y="0"/>
+                </a:lnTo>
+                <a:lnTo>
+                  <a:pt x="120000" y="120000"/>
+                </a:lnTo>
+                <a:lnTo>
+                  <a:pt x="0" y="120000"/>
+                </a:lnTo>
+                <a:close/>
+              </a:path>
+            </a:pathLst>
+          </a:custGeom>
+        </p:spPr>
+      </p:sp>
+    </p:spTree>
+    <p:extLst>
+      <p:ext uri="{BB962C8B-B14F-4D97-AF65-F5344CB8AC3E}">
+        <p14:creationId xmlns:p14="http://schemas.microsoft.com/office/powerpoint/2010/main" val="2136157181"/>
+      </p:ext>
+    </p:extLst>
+  </p:cSld>
+  <p:clrMapOvr>
+    <a:masterClrMapping/>
+  </p:clrMapOvr>
+</p:notes>
+</file>
+
+<file path=ppt/notesSlides/notesSlide6.xml><?xml version="1.0" encoding="utf-8"?>
+<p:notes xmlns:a="http://schemas.openxmlformats.org/drawingml/2006/main" xmlns:r="http://schemas.openxmlformats.org/officeDocument/2006/relationships" xmlns:p="http://schemas.openxmlformats.org/presentationml/2006/main" showMasterSp="0" showMasterPhAnim="0">
+  <p:cSld>
+    <p:spTree>
+      <p:nvGrpSpPr>
+        <p:cNvPr id="1" name="Shape 125">
+          <a:extLst>
+            <a:ext uri="{FF2B5EF4-FFF2-40B4-BE49-F238E27FC236}">
+              <a16:creationId xmlns:a16="http://schemas.microsoft.com/office/drawing/2014/main" id="{8529EFDE-51D2-76A8-958A-47486917E3EC}"/>
+            </a:ext>
+          </a:extLst>
+        </p:cNvPr>
+        <p:cNvGrpSpPr/>
+        <p:nvPr/>
+      </p:nvGrpSpPr>
+      <p:grpSpPr>
+        <a:xfrm>
+          <a:off x="0" y="0"/>
+          <a:ext cx="0" cy="0"/>
+          <a:chOff x="0" y="0"/>
+          <a:chExt cx="0" cy="0"/>
+        </a:xfrm>
+      </p:grpSpPr>
+      <p:sp>
+        <p:nvSpPr>
+          <p:cNvPr id="126" name="Google Shape;126;p3:notes">
+            <a:extLst>
+              <a:ext uri="{FF2B5EF4-FFF2-40B4-BE49-F238E27FC236}">
+                <a16:creationId xmlns:a16="http://schemas.microsoft.com/office/drawing/2014/main" id="{69194C7D-A1E6-4052-6DF7-023EAA78D3D0}"/>
+              </a:ext>
+            </a:extLst>
+          </p:cNvPr>
+          <p:cNvSpPr txBox="1">
+            <a:spLocks noGrp="1"/>
+          </p:cNvSpPr>
+          <p:nvPr>
+            <p:ph type="body" idx="1"/>
+          </p:nvPr>
+        </p:nvSpPr>
+        <p:spPr>
+          <a:xfrm>
+            <a:off x="914400" y="4343400"/>
+            <a:ext cx="5029200" cy="4114800"/>
+          </a:xfrm>
+          <a:prstGeom prst="rect">
+            <a:avLst/>
+          </a:prstGeom>
+        </p:spPr>
+        <p:txBody>
+          <a:bodyPr spcFirstLastPara="1" wrap="square" lIns="91425" tIns="45700" rIns="91425" bIns="45700" anchor="t" anchorCtr="0">
+            <a:noAutofit/>
+          </a:bodyPr>
+          <a:lstStyle/>
+          <a:p>
+            <a:pPr marL="0" lvl="0" indent="0" algn="l" rtl="0">
+              <a:spcBef>
+                <a:spcPts val="0"/>
+              </a:spcBef>
+              <a:spcAft>
+                <a:spcPts val="0"/>
+              </a:spcAft>
+              <a:buNone/>
+            </a:pPr>
+            <a:endParaRPr/>
+          </a:p>
+        </p:txBody>
+      </p:sp>
+      <p:sp>
+        <p:nvSpPr>
+          <p:cNvPr id="127" name="Google Shape;127;p3:notes">
+            <a:extLst>
+              <a:ext uri="{FF2B5EF4-FFF2-40B4-BE49-F238E27FC236}">
+                <a16:creationId xmlns:a16="http://schemas.microsoft.com/office/drawing/2014/main" id="{1379DEE0-CE75-2A41-BC13-6CB424ACA071}"/>
+              </a:ext>
+            </a:extLst>
+          </p:cNvPr>
+          <p:cNvSpPr>
+            <a:spLocks noGrp="1" noRot="1" noChangeAspect="1"/>
+          </p:cNvSpPr>
+          <p:nvPr>
+            <p:ph type="sldImg" idx="2"/>
+          </p:nvPr>
+        </p:nvSpPr>
+        <p:spPr>
+          <a:xfrm>
+            <a:off x="1143000" y="685800"/>
+            <a:ext cx="4572000" cy="3429000"/>
+          </a:xfrm>
+          <a:custGeom>
+            <a:avLst/>
+            <a:gdLst/>
+            <a:ahLst/>
+            <a:cxnLst/>
+            <a:rect l="l" t="t" r="r" b="b"/>
+            <a:pathLst>
+              <a:path w="120000" h="120000" extrusionOk="0">
+                <a:moveTo>
+                  <a:pt x="0" y="0"/>
+                </a:moveTo>
+                <a:lnTo>
+                  <a:pt x="120000" y="0"/>
+                </a:lnTo>
+                <a:lnTo>
+                  <a:pt x="120000" y="120000"/>
+                </a:lnTo>
+                <a:lnTo>
+                  <a:pt x="0" y="120000"/>
+                </a:lnTo>
+                <a:close/>
+              </a:path>
+            </a:pathLst>
+          </a:custGeom>
+        </p:spPr>
+      </p:sp>
+    </p:spTree>
+    <p:extLst>
+      <p:ext uri="{BB962C8B-B14F-4D97-AF65-F5344CB8AC3E}">
+        <p14:creationId xmlns:p14="http://schemas.microsoft.com/office/powerpoint/2010/main" val="1613230880"/>
+      </p:ext>
+    </p:extLst>
+  </p:cSld>
+  <p:clrMapOvr>
+    <a:masterClrMapping/>
+  </p:clrMapOvr>
+</p:notes>
+</file>
+
+<file path=ppt/notesSlides/notesSlide7.xml><?xml version="1.0" encoding="utf-8"?>
 <p:notes xmlns:a="http://schemas.openxmlformats.org/drawingml/2006/main" xmlns:r="http://schemas.openxmlformats.org/officeDocument/2006/relationships" xmlns:p="http://schemas.openxmlformats.org/presentationml/2006/main" showMasterSp="0" showMasterPhAnim="0">
   <p:cSld>
     <p:spTree>
@@ -12544,7 +12800,7 @@
         </p:blipFill>
         <p:spPr>
           <a:xfrm>
-            <a:off x="2941461" y="6644687"/>
+            <a:off x="2941461" y="6676278"/>
             <a:ext cx="6793995" cy="1780353"/>
           </a:xfrm>
           <a:prstGeom prst="rect">
@@ -12571,7 +12827,7 @@
         <p:spPr>
           <a:xfrm>
             <a:off x="387209" y="2174366"/>
-            <a:ext cx="11902500" cy="4524275"/>
+            <a:ext cx="11902500" cy="5262939"/>
           </a:xfrm>
           <a:prstGeom prst="rect">
             <a:avLst/>
@@ -12587,17 +12843,10 @@
           </a:bodyPr>
           <a:lstStyle/>
           <a:p>
-            <a:pPr marL="0" lvl="0" indent="0" algn="l" rtl="0">
+            <a:pPr>
               <a:lnSpc>
                 <a:spcPct val="200000"/>
               </a:lnSpc>
-              <a:spcBef>
-                <a:spcPts val="0"/>
-              </a:spcBef>
-              <a:spcAft>
-                <a:spcPts val="0"/>
-              </a:spcAft>
-              <a:buNone/>
             </a:pPr>
             <a:r>
               <a:rPr lang="it-IT" sz="2400" b="1" dirty="0" err="1">
@@ -12607,7 +12856,6 @@
                 <a:latin typeface="Helvetica Neue"/>
                 <a:ea typeface="Helvetica Neue"/>
                 <a:cs typeface="Helvetica Neue"/>
-                <a:sym typeface="Helvetica Neue"/>
               </a:rPr>
               <a:t>PlayWise</a:t>
             </a:r>
@@ -12619,19 +12867,491 @@
                 <a:latin typeface="Helvetica Neue"/>
                 <a:ea typeface="Helvetica Neue"/>
                 <a:cs typeface="Helvetica Neue"/>
-                <a:sym typeface="Helvetica Neue"/>
               </a:rPr>
-              <a:t> è una piattaforma nata per:</a:t>
-            </a:r>
-            <a:endParaRPr sz="2400" b="1" dirty="0">
+              <a:t> </a:t>
+            </a:r>
+            <a:r>
+              <a:rPr lang="it-IT" sz="2400" b="1" dirty="0" err="1">
+                <a:solidFill>
+                  <a:srgbClr val="303030"/>
+                </a:solidFill>
+                <a:latin typeface="Helvetica Neue"/>
+                <a:ea typeface="Helvetica Neue"/>
+                <a:cs typeface="Helvetica Neue"/>
+              </a:rPr>
+              <a:t>is</a:t>
+            </a:r>
+            <a:r>
+              <a:rPr lang="it-IT" sz="2400" b="1" dirty="0">
+                <a:solidFill>
+                  <a:srgbClr val="303030"/>
+                </a:solidFill>
+                <a:latin typeface="Helvetica Neue"/>
+                <a:ea typeface="Helvetica Neue"/>
+                <a:cs typeface="Helvetica Neue"/>
+              </a:rPr>
+              <a:t> a </a:t>
+            </a:r>
+            <a:r>
+              <a:rPr lang="it-IT" sz="2400" b="1" dirty="0" err="1">
+                <a:solidFill>
+                  <a:srgbClr val="303030"/>
+                </a:solidFill>
+                <a:latin typeface="Helvetica Neue"/>
+                <a:ea typeface="Helvetica Neue"/>
+                <a:cs typeface="Helvetica Neue"/>
+              </a:rPr>
+              <a:t>platform</a:t>
+            </a:r>
+            <a:r>
+              <a:rPr lang="it-IT" sz="2400" b="1" dirty="0">
+                <a:solidFill>
+                  <a:srgbClr val="303030"/>
+                </a:solidFill>
+                <a:latin typeface="Helvetica Neue"/>
+                <a:ea typeface="Helvetica Neue"/>
+                <a:cs typeface="Helvetica Neue"/>
+              </a:rPr>
+              <a:t> </a:t>
+            </a:r>
+            <a:r>
+              <a:rPr lang="it-IT" sz="2400" b="1" dirty="0" err="1">
+                <a:solidFill>
+                  <a:srgbClr val="303030"/>
+                </a:solidFill>
+                <a:latin typeface="Helvetica Neue"/>
+                <a:ea typeface="Helvetica Neue"/>
+                <a:cs typeface="Helvetica Neue"/>
+              </a:rPr>
+              <a:t>designed</a:t>
+            </a:r>
+            <a:r>
+              <a:rPr lang="it-IT" sz="2400" b="1" dirty="0">
+                <a:solidFill>
+                  <a:srgbClr val="303030"/>
+                </a:solidFill>
+                <a:latin typeface="Helvetica Neue"/>
+                <a:ea typeface="Helvetica Neue"/>
+                <a:cs typeface="Helvetica Neue"/>
+              </a:rPr>
+              <a:t> to:</a:t>
+            </a:r>
+          </a:p>
+          <a:p>
+            <a:pPr marL="800100" lvl="1" indent="-342900">
+              <a:lnSpc>
+                <a:spcPct val="200000"/>
+              </a:lnSpc>
+              <a:buFont typeface="Arial" panose="020B0604020202020204" pitchFamily="34" charset="0"/>
+              <a:buChar char="•"/>
+            </a:pPr>
+            <a:r>
+              <a:rPr lang="it-IT" sz="2400" b="1" dirty="0" err="1">
+                <a:solidFill>
+                  <a:srgbClr val="303030"/>
+                </a:solidFill>
+                <a:latin typeface="Helvetica Neue"/>
+                <a:ea typeface="Helvetica Neue"/>
+                <a:cs typeface="Helvetica Neue"/>
+              </a:rPr>
+              <a:t>Allow</a:t>
+            </a:r>
+            <a:r>
+              <a:rPr lang="it-IT" sz="2400" b="1" dirty="0">
+                <a:solidFill>
+                  <a:srgbClr val="303030"/>
+                </a:solidFill>
+                <a:latin typeface="Helvetica Neue"/>
+                <a:ea typeface="Helvetica Neue"/>
+                <a:cs typeface="Helvetica Neue"/>
+              </a:rPr>
+              <a:t> users to </a:t>
+            </a:r>
+            <a:r>
+              <a:rPr lang="it-IT" sz="2400" b="1" dirty="0" err="1">
+                <a:solidFill>
+                  <a:srgbClr val="303030"/>
+                </a:solidFill>
+                <a:latin typeface="Helvetica Neue"/>
+                <a:ea typeface="Helvetica Neue"/>
+                <a:cs typeface="Helvetica Neue"/>
+              </a:rPr>
+              <a:t>explore</a:t>
+            </a:r>
+            <a:r>
+              <a:rPr lang="it-IT" sz="2400" b="1" dirty="0">
+                <a:solidFill>
+                  <a:srgbClr val="303030"/>
+                </a:solidFill>
+                <a:latin typeface="Helvetica Neue"/>
+                <a:ea typeface="Helvetica Neue"/>
+                <a:cs typeface="Helvetica Neue"/>
+              </a:rPr>
+              <a:t> and </a:t>
+            </a:r>
+            <a:r>
+              <a:rPr lang="it-IT" sz="2400" b="1" dirty="0" err="1">
+                <a:solidFill>
+                  <a:srgbClr val="303030"/>
+                </a:solidFill>
+                <a:latin typeface="Helvetica Neue"/>
+                <a:ea typeface="Helvetica Neue"/>
+                <a:cs typeface="Helvetica Neue"/>
+              </a:rPr>
+              <a:t>discover</a:t>
+            </a:r>
+            <a:r>
+              <a:rPr lang="it-IT" sz="2400" b="1" dirty="0">
+                <a:solidFill>
+                  <a:srgbClr val="303030"/>
+                </a:solidFill>
+                <a:latin typeface="Helvetica Neue"/>
+                <a:ea typeface="Helvetica Neue"/>
+                <a:cs typeface="Helvetica Neue"/>
+              </a:rPr>
+              <a:t> new video games</a:t>
+            </a:r>
+          </a:p>
+          <a:p>
+            <a:pPr marL="800100" lvl="1" indent="-342900">
+              <a:lnSpc>
+                <a:spcPct val="200000"/>
+              </a:lnSpc>
+              <a:buFont typeface="Arial" panose="020B0604020202020204" pitchFamily="34" charset="0"/>
+              <a:buChar char="•"/>
+            </a:pPr>
+            <a:r>
+              <a:rPr lang="it-IT" sz="2400" b="1" dirty="0">
+                <a:solidFill>
+                  <a:srgbClr val="303030"/>
+                </a:solidFill>
+                <a:latin typeface="Helvetica Neue"/>
+                <a:ea typeface="Helvetica Neue"/>
+                <a:cs typeface="Helvetica Neue"/>
+              </a:rPr>
+              <a:t>Share </a:t>
+            </a:r>
+            <a:r>
+              <a:rPr lang="it-IT" sz="2400" b="1" dirty="0" err="1">
+                <a:solidFill>
+                  <a:srgbClr val="303030"/>
+                </a:solidFill>
+                <a:latin typeface="Helvetica Neue"/>
+                <a:ea typeface="Helvetica Neue"/>
+                <a:cs typeface="Helvetica Neue"/>
+              </a:rPr>
+              <a:t>their</a:t>
+            </a:r>
+            <a:r>
+              <a:rPr lang="it-IT" sz="2400" b="1" dirty="0">
+                <a:solidFill>
+                  <a:srgbClr val="303030"/>
+                </a:solidFill>
+                <a:latin typeface="Helvetica Neue"/>
+                <a:ea typeface="Helvetica Neue"/>
+                <a:cs typeface="Helvetica Neue"/>
+              </a:rPr>
+              <a:t> </a:t>
+            </a:r>
+            <a:r>
+              <a:rPr lang="it-IT" sz="2400" b="1" dirty="0" err="1">
+                <a:solidFill>
+                  <a:srgbClr val="303030"/>
+                </a:solidFill>
+                <a:latin typeface="Helvetica Neue"/>
+                <a:ea typeface="Helvetica Neue"/>
+                <a:cs typeface="Helvetica Neue"/>
+              </a:rPr>
+              <a:t>impressions</a:t>
+            </a:r>
+            <a:r>
+              <a:rPr lang="it-IT" sz="2400" b="1" dirty="0">
+                <a:solidFill>
+                  <a:srgbClr val="303030"/>
+                </a:solidFill>
+                <a:latin typeface="Helvetica Neue"/>
+                <a:ea typeface="Helvetica Neue"/>
+                <a:cs typeface="Helvetica Neue"/>
+              </a:rPr>
+              <a:t> with </a:t>
+            </a:r>
+            <a:r>
+              <a:rPr lang="it-IT" sz="2400" b="1" dirty="0" err="1">
+                <a:solidFill>
+                  <a:srgbClr val="303030"/>
+                </a:solidFill>
+                <a:latin typeface="Helvetica Neue"/>
+                <a:ea typeface="Helvetica Neue"/>
+                <a:cs typeface="Helvetica Neue"/>
+              </a:rPr>
+              <a:t>other</a:t>
+            </a:r>
+            <a:r>
+              <a:rPr lang="it-IT" sz="2400" b="1" dirty="0">
+                <a:solidFill>
+                  <a:srgbClr val="303030"/>
+                </a:solidFill>
+                <a:latin typeface="Helvetica Neue"/>
+                <a:ea typeface="Helvetica Neue"/>
+                <a:cs typeface="Helvetica Neue"/>
+              </a:rPr>
+              <a:t> users on the </a:t>
+            </a:r>
+            <a:r>
+              <a:rPr lang="it-IT" sz="2400" b="1" dirty="0" err="1">
+                <a:solidFill>
+                  <a:srgbClr val="303030"/>
+                </a:solidFill>
+                <a:latin typeface="Helvetica Neue"/>
+                <a:ea typeface="Helvetica Neue"/>
+                <a:cs typeface="Helvetica Neue"/>
+              </a:rPr>
+              <a:t>platform</a:t>
+            </a:r>
+            <a:endParaRPr lang="it-IT" sz="2400" b="1" dirty="0">
               <a:solidFill>
                 <a:srgbClr val="303030"/>
               </a:solidFill>
               <a:latin typeface="Helvetica Neue"/>
               <a:ea typeface="Helvetica Neue"/>
               <a:cs typeface="Helvetica Neue"/>
-              <a:sym typeface="Helvetica Neue"/>
             </a:endParaRPr>
+          </a:p>
+          <a:p>
+            <a:pPr marL="800100" lvl="1" indent="-342900">
+              <a:lnSpc>
+                <a:spcPct val="200000"/>
+              </a:lnSpc>
+              <a:buFont typeface="Arial" panose="020B0604020202020204" pitchFamily="34" charset="0"/>
+              <a:buChar char="•"/>
+            </a:pPr>
+            <a:r>
+              <a:rPr lang="it-IT" sz="2400" b="1" dirty="0" err="1">
+                <a:solidFill>
+                  <a:srgbClr val="303030"/>
+                </a:solidFill>
+                <a:latin typeface="Helvetica Neue"/>
+                <a:ea typeface="Helvetica Neue"/>
+                <a:cs typeface="Helvetica Neue"/>
+              </a:rPr>
+              <a:t>Offer</a:t>
+            </a:r>
+            <a:r>
+              <a:rPr lang="it-IT" sz="2400" b="1" dirty="0">
+                <a:solidFill>
+                  <a:srgbClr val="303030"/>
+                </a:solidFill>
+                <a:latin typeface="Helvetica Neue"/>
+                <a:ea typeface="Helvetica Neue"/>
+                <a:cs typeface="Helvetica Neue"/>
+              </a:rPr>
+              <a:t> a wide </a:t>
+            </a:r>
+            <a:r>
+              <a:rPr lang="it-IT" sz="2400" b="1" dirty="0" err="1">
+                <a:solidFill>
+                  <a:srgbClr val="303030"/>
+                </a:solidFill>
+                <a:latin typeface="Helvetica Neue"/>
+                <a:ea typeface="Helvetica Neue"/>
+                <a:cs typeface="Helvetica Neue"/>
+              </a:rPr>
+              <a:t>catalog</a:t>
+            </a:r>
+            <a:r>
+              <a:rPr lang="it-IT" sz="2400" b="1" dirty="0">
+                <a:solidFill>
+                  <a:srgbClr val="303030"/>
+                </a:solidFill>
+                <a:latin typeface="Helvetica Neue"/>
+                <a:ea typeface="Helvetica Neue"/>
+                <a:cs typeface="Helvetica Neue"/>
+              </a:rPr>
+              <a:t> of video games and an </a:t>
+            </a:r>
+            <a:r>
+              <a:rPr lang="it-IT" sz="2400" b="1" dirty="0" err="1">
+                <a:solidFill>
+                  <a:srgbClr val="303030"/>
+                </a:solidFill>
+                <a:latin typeface="Helvetica Neue"/>
+                <a:ea typeface="Helvetica Neue"/>
+                <a:cs typeface="Helvetica Neue"/>
+              </a:rPr>
+              <a:t>active</a:t>
+            </a:r>
+            <a:r>
+              <a:rPr lang="it-IT" sz="2400" b="1" dirty="0">
+                <a:solidFill>
+                  <a:srgbClr val="303030"/>
+                </a:solidFill>
+                <a:latin typeface="Helvetica Neue"/>
+                <a:ea typeface="Helvetica Neue"/>
+                <a:cs typeface="Helvetica Neue"/>
+              </a:rPr>
+              <a:t> user community</a:t>
+            </a:r>
+          </a:p>
+          <a:p>
+            <a:pPr marL="800100" lvl="1" indent="-342900">
+              <a:lnSpc>
+                <a:spcPct val="200000"/>
+              </a:lnSpc>
+              <a:buFont typeface="Arial" panose="020B0604020202020204" pitchFamily="34" charset="0"/>
+              <a:buChar char="•"/>
+            </a:pPr>
+            <a:r>
+              <a:rPr lang="it-IT" sz="2400" b="1" dirty="0" err="1">
+                <a:solidFill>
+                  <a:srgbClr val="303030"/>
+                </a:solidFill>
+                <a:latin typeface="Helvetica Neue"/>
+                <a:ea typeface="Helvetica Neue"/>
+                <a:cs typeface="Helvetica Neue"/>
+              </a:rPr>
+              <a:t>Provide</a:t>
+            </a:r>
+            <a:r>
+              <a:rPr lang="it-IT" sz="2400" b="1" dirty="0">
+                <a:solidFill>
+                  <a:srgbClr val="303030"/>
+                </a:solidFill>
+                <a:latin typeface="Helvetica Neue"/>
+                <a:ea typeface="Helvetica Neue"/>
+                <a:cs typeface="Helvetica Neue"/>
+              </a:rPr>
+              <a:t> </a:t>
+            </a:r>
+            <a:r>
+              <a:rPr lang="it-IT" sz="2400" b="1" dirty="0" err="1">
+                <a:solidFill>
+                  <a:srgbClr val="303030"/>
+                </a:solidFill>
+                <a:latin typeface="Helvetica Neue"/>
+                <a:ea typeface="Helvetica Neue"/>
+                <a:cs typeface="Helvetica Neue"/>
+              </a:rPr>
+              <a:t>intelligent</a:t>
+            </a:r>
+            <a:r>
+              <a:rPr lang="it-IT" sz="2400" b="1" dirty="0">
+                <a:solidFill>
+                  <a:srgbClr val="303030"/>
+                </a:solidFill>
+                <a:latin typeface="Helvetica Neue"/>
+                <a:ea typeface="Helvetica Neue"/>
+                <a:cs typeface="Helvetica Neue"/>
+              </a:rPr>
+              <a:t> </a:t>
+            </a:r>
+            <a:r>
+              <a:rPr lang="it-IT" sz="2400" b="1" dirty="0" err="1">
+                <a:solidFill>
+                  <a:srgbClr val="303030"/>
+                </a:solidFill>
+                <a:latin typeface="Helvetica Neue"/>
+                <a:ea typeface="Helvetica Neue"/>
+                <a:cs typeface="Helvetica Neue"/>
+              </a:rPr>
+              <a:t>recommendations</a:t>
+            </a:r>
+            <a:r>
+              <a:rPr lang="it-IT" sz="2400" b="1" dirty="0">
+                <a:solidFill>
+                  <a:srgbClr val="303030"/>
+                </a:solidFill>
+                <a:latin typeface="Helvetica Neue"/>
+                <a:ea typeface="Helvetica Neue"/>
+                <a:cs typeface="Helvetica Neue"/>
+              </a:rPr>
+              <a:t> for new games</a:t>
+            </a:r>
+          </a:p>
+          <a:p>
+            <a:pPr marL="800100" lvl="1" indent="-342900">
+              <a:lnSpc>
+                <a:spcPct val="200000"/>
+              </a:lnSpc>
+              <a:buFont typeface="Arial" panose="020B0604020202020204" pitchFamily="34" charset="0"/>
+              <a:buChar char="•"/>
+            </a:pPr>
+            <a:r>
+              <a:rPr lang="it-IT" sz="2400" b="1" dirty="0">
+                <a:solidFill>
+                  <a:srgbClr val="303030"/>
+                </a:solidFill>
+                <a:latin typeface="Helvetica Neue"/>
+                <a:ea typeface="Helvetica Neue"/>
+                <a:cs typeface="Helvetica Neue"/>
+              </a:rPr>
+              <a:t>Include a PEGI </a:t>
+            </a:r>
+            <a:r>
+              <a:rPr lang="it-IT" sz="2400" b="1" dirty="0" err="1">
+                <a:solidFill>
+                  <a:srgbClr val="303030"/>
+                </a:solidFill>
+                <a:latin typeface="Helvetica Neue"/>
+                <a:ea typeface="Helvetica Neue"/>
+                <a:cs typeface="Helvetica Neue"/>
+              </a:rPr>
+              <a:t>classification</a:t>
+            </a:r>
+            <a:r>
+              <a:rPr lang="it-IT" sz="2400" b="1" dirty="0">
+                <a:solidFill>
+                  <a:srgbClr val="303030"/>
+                </a:solidFill>
+                <a:latin typeface="Helvetica Neue"/>
+                <a:ea typeface="Helvetica Neue"/>
+                <a:cs typeface="Helvetica Neue"/>
+              </a:rPr>
+              <a:t> system (</a:t>
+            </a:r>
+            <a:r>
+              <a:rPr lang="it-IT" sz="2400" b="1" dirty="0" err="1">
+                <a:solidFill>
+                  <a:srgbClr val="303030"/>
+                </a:solidFill>
+                <a:latin typeface="Helvetica Neue"/>
+                <a:ea typeface="Helvetica Neue"/>
+                <a:cs typeface="Helvetica Neue"/>
+              </a:rPr>
+              <a:t>specifically</a:t>
+            </a:r>
+            <a:r>
+              <a:rPr lang="it-IT" sz="2400" b="1" dirty="0">
+                <a:solidFill>
+                  <a:srgbClr val="303030"/>
+                </a:solidFill>
+                <a:latin typeface="Helvetica Neue"/>
+                <a:ea typeface="Helvetica Neue"/>
+                <a:cs typeface="Helvetica Neue"/>
+              </a:rPr>
+              <a:t> </a:t>
+            </a:r>
+            <a:r>
+              <a:rPr lang="it-IT" sz="2400" b="1" dirty="0" err="1">
+                <a:solidFill>
+                  <a:srgbClr val="303030"/>
+                </a:solidFill>
+                <a:latin typeface="Helvetica Neue"/>
+                <a:ea typeface="Helvetica Neue"/>
+                <a:cs typeface="Helvetica Neue"/>
+              </a:rPr>
+              <a:t>created</a:t>
+            </a:r>
+            <a:r>
+              <a:rPr lang="it-IT" sz="2400" b="1" dirty="0">
+                <a:solidFill>
+                  <a:srgbClr val="303030"/>
+                </a:solidFill>
+                <a:latin typeface="Helvetica Neue"/>
+                <a:ea typeface="Helvetica Neue"/>
+                <a:cs typeface="Helvetica Neue"/>
+              </a:rPr>
+              <a:t> for the project)</a:t>
+            </a:r>
           </a:p>
           <a:p>
             <a:pPr marL="457200" marR="0" lvl="0" indent="-457200" algn="l" rtl="0">
@@ -12651,229 +13371,6 @@
               <a:buFont typeface="Arial"/>
               <a:buChar char="•"/>
             </a:pPr>
-            <a:r>
-              <a:rPr lang="it-IT" sz="2400" b="1" dirty="0">
-                <a:solidFill>
-                  <a:srgbClr val="303030"/>
-                </a:solidFill>
-                <a:latin typeface="Helvetica Neue"/>
-                <a:ea typeface="Helvetica Neue"/>
-                <a:cs typeface="Helvetica Neue"/>
-                <a:sym typeface="Helvetica Neue"/>
-              </a:rPr>
-              <a:t>P</a:t>
-            </a:r>
-            <a:r>
-              <a:rPr lang="it-IT" sz="2400" b="1" i="0" u="none" strike="noStrike" cap="none" dirty="0">
-                <a:solidFill>
-                  <a:srgbClr val="303030"/>
-                </a:solidFill>
-                <a:latin typeface="Helvetica Neue"/>
-                <a:ea typeface="Helvetica Neue"/>
-                <a:cs typeface="Helvetica Neue"/>
-                <a:sym typeface="Helvetica Neue"/>
-              </a:rPr>
-              <a:t>ermettere agli utenti di esplorare e scoprire nuovi videogiochi</a:t>
-            </a:r>
-            <a:endParaRPr sz="2400" b="1" i="0" u="none" strike="noStrike" cap="none" dirty="0">
-              <a:solidFill>
-                <a:srgbClr val="303030"/>
-              </a:solidFill>
-              <a:latin typeface="Play"/>
-              <a:ea typeface="Play"/>
-              <a:cs typeface="Play"/>
-              <a:sym typeface="Play"/>
-            </a:endParaRPr>
-          </a:p>
-          <a:p>
-            <a:pPr marL="457200" marR="0" lvl="0" indent="-457200" algn="l" rtl="0">
-              <a:lnSpc>
-                <a:spcPct val="200000"/>
-              </a:lnSpc>
-              <a:spcBef>
-                <a:spcPts val="0"/>
-              </a:spcBef>
-              <a:spcAft>
-                <a:spcPts val="0"/>
-              </a:spcAft>
-              <a:buClr>
-                <a:srgbClr val="303030"/>
-              </a:buClr>
-              <a:buSzPts val="2400"/>
-              <a:buFont typeface="Arial"/>
-              <a:buChar char="•"/>
-            </a:pPr>
-            <a:r>
-              <a:rPr lang="it-IT" sz="2400" b="1" i="0" u="none" strike="noStrike" cap="none" dirty="0">
-                <a:solidFill>
-                  <a:srgbClr val="303030"/>
-                </a:solidFill>
-                <a:latin typeface="Helvetica Neue"/>
-                <a:ea typeface="Helvetica Neue"/>
-                <a:cs typeface="Helvetica Neue"/>
-                <a:sym typeface="Helvetica Neue"/>
-              </a:rPr>
-              <a:t>Condividere le proprie impressioni con gli altri utenti della piattaforma</a:t>
-            </a:r>
-            <a:endParaRPr sz="2400" b="1" i="0" u="none" strike="noStrike" cap="none" dirty="0">
-              <a:solidFill>
-                <a:srgbClr val="303030"/>
-              </a:solidFill>
-              <a:latin typeface="Helvetica Neue"/>
-              <a:ea typeface="Helvetica Neue"/>
-              <a:cs typeface="Helvetica Neue"/>
-              <a:sym typeface="Helvetica Neue"/>
-            </a:endParaRPr>
-          </a:p>
-          <a:p>
-            <a:pPr marL="457200" marR="0" lvl="0" indent="-457200" algn="l" rtl="0">
-              <a:lnSpc>
-                <a:spcPct val="200000"/>
-              </a:lnSpc>
-              <a:spcBef>
-                <a:spcPts val="0"/>
-              </a:spcBef>
-              <a:spcAft>
-                <a:spcPts val="0"/>
-              </a:spcAft>
-              <a:buClr>
-                <a:srgbClr val="303030"/>
-              </a:buClr>
-              <a:buSzPts val="2400"/>
-              <a:buFont typeface="Arial"/>
-              <a:buChar char="•"/>
-            </a:pPr>
-            <a:r>
-              <a:rPr lang="it-IT" sz="2400" b="1" i="0" u="none" strike="noStrike" cap="none" dirty="0">
-                <a:solidFill>
-                  <a:srgbClr val="303030"/>
-                </a:solidFill>
-                <a:latin typeface="Helvetica Neue"/>
-                <a:ea typeface="Helvetica Neue"/>
-                <a:cs typeface="Helvetica Neue"/>
-                <a:sym typeface="Helvetica Neue"/>
-              </a:rPr>
-              <a:t>Offr</a:t>
-            </a:r>
-            <a:r>
-              <a:rPr lang="it-IT" sz="2400" b="1" dirty="0">
-                <a:solidFill>
-                  <a:srgbClr val="303030"/>
-                </a:solidFill>
-                <a:latin typeface="Helvetica Neue"/>
-                <a:ea typeface="Helvetica Neue"/>
-                <a:cs typeface="Helvetica Neue"/>
-                <a:sym typeface="Helvetica Neue"/>
-              </a:rPr>
-              <a:t>ire</a:t>
-            </a:r>
-            <a:r>
-              <a:rPr lang="it-IT" sz="2400" b="1" i="0" u="none" strike="noStrike" cap="none" dirty="0">
-                <a:solidFill>
-                  <a:srgbClr val="303030"/>
-                </a:solidFill>
-                <a:latin typeface="Helvetica Neue"/>
-                <a:ea typeface="Helvetica Neue"/>
-                <a:cs typeface="Helvetica Neue"/>
-                <a:sym typeface="Helvetica Neue"/>
-              </a:rPr>
-              <a:t> un ampio catalogo di videogiochi e una comunità attiva di utenti</a:t>
-            </a:r>
-            <a:endParaRPr lang="it-IT" sz="2400" b="1" dirty="0">
-              <a:solidFill>
-                <a:srgbClr val="303030"/>
-              </a:solidFill>
-              <a:latin typeface="Helvetica Neue"/>
-              <a:ea typeface="Helvetica Neue"/>
-              <a:cs typeface="Helvetica Neue"/>
-              <a:sym typeface="Helvetica Neue"/>
-            </a:endParaRPr>
-          </a:p>
-          <a:p>
-            <a:pPr marL="457200" marR="0" lvl="0" indent="-457200" algn="l" rtl="0">
-              <a:lnSpc>
-                <a:spcPct val="200000"/>
-              </a:lnSpc>
-              <a:spcBef>
-                <a:spcPts val="0"/>
-              </a:spcBef>
-              <a:spcAft>
-                <a:spcPts val="0"/>
-              </a:spcAft>
-              <a:buClr>
-                <a:srgbClr val="303030"/>
-              </a:buClr>
-              <a:buSzPts val="2400"/>
-              <a:buFont typeface="Arial"/>
-              <a:buChar char="•"/>
-            </a:pPr>
-            <a:r>
-              <a:rPr lang="it-IT" sz="2400" b="1" i="0" u="none" strike="noStrike" cap="none" dirty="0">
-                <a:solidFill>
-                  <a:srgbClr val="303030"/>
-                </a:solidFill>
-                <a:latin typeface="Helvetica Neue"/>
-                <a:ea typeface="Helvetica Neue"/>
-                <a:cs typeface="Helvetica Neue"/>
-                <a:sym typeface="Helvetica Neue"/>
-              </a:rPr>
-              <a:t>Cons</a:t>
-            </a:r>
-            <a:r>
-              <a:rPr lang="it-IT" sz="2400" b="1" dirty="0">
-                <a:solidFill>
-                  <a:srgbClr val="303030"/>
-                </a:solidFill>
-                <a:latin typeface="Helvetica Neue"/>
-                <a:ea typeface="Helvetica Neue"/>
-                <a:cs typeface="Helvetica Neue"/>
-                <a:sym typeface="Helvetica Neue"/>
-              </a:rPr>
-              <a:t>igliare nuovi videogiochi in maniera intelligente</a:t>
-            </a:r>
-          </a:p>
-          <a:p>
-            <a:pPr marL="457200" marR="0" lvl="0" indent="-457200" algn="l" rtl="0">
-              <a:lnSpc>
-                <a:spcPct val="200000"/>
-              </a:lnSpc>
-              <a:spcBef>
-                <a:spcPts val="0"/>
-              </a:spcBef>
-              <a:spcAft>
-                <a:spcPts val="0"/>
-              </a:spcAft>
-              <a:buClr>
-                <a:srgbClr val="303030"/>
-              </a:buClr>
-              <a:buSzPts val="2400"/>
-              <a:buFont typeface="Arial"/>
-              <a:buChar char="•"/>
-            </a:pPr>
-            <a:r>
-              <a:rPr lang="it-IT" sz="2400" b="1" i="0" u="none" strike="noStrike" cap="none" dirty="0">
-                <a:solidFill>
-                  <a:srgbClr val="303030"/>
-                </a:solidFill>
-                <a:latin typeface="Helvetica Neue"/>
-                <a:ea typeface="Helvetica Neue"/>
-                <a:cs typeface="Helvetica Neue"/>
-                <a:sym typeface="Helvetica Neue"/>
-              </a:rPr>
-              <a:t>Classi</a:t>
-            </a:r>
-            <a:r>
-              <a:rPr lang="it-IT" sz="2400" b="1" dirty="0">
-                <a:solidFill>
-                  <a:srgbClr val="303030"/>
-                </a:solidFill>
-                <a:latin typeface="Helvetica Neue"/>
-                <a:ea typeface="Helvetica Neue"/>
-                <a:cs typeface="Helvetica Neue"/>
-                <a:sym typeface="Helvetica Neue"/>
-              </a:rPr>
-              <a:t>ficatore PEGI</a:t>
-            </a:r>
             <a:endParaRPr lang="it-IT" sz="2400" b="1" i="0" u="none" strike="noStrike" cap="none" dirty="0">
               <a:solidFill>
                 <a:srgbClr val="303030"/>
@@ -12957,6 +13454,30 @@
                 <a:sym typeface="Helvetica Neue"/>
               </a:rPr>
               <a:t>layWise</a:t>
+            </a:r>
+            <a:r>
+              <a:rPr lang="it-IT" sz="4400" b="0" i="0" u="none" strike="noStrike" cap="none" dirty="0">
+                <a:solidFill>
+                  <a:srgbClr val="303030"/>
+                </a:solidFill>
+                <a:latin typeface="Helvetica Neue"/>
+                <a:ea typeface="Helvetica Neue"/>
+                <a:cs typeface="Helvetica Neue"/>
+                <a:sym typeface="Helvetica Neue"/>
+              </a:rPr>
+              <a:t> </a:t>
+            </a:r>
+            <a:r>
+              <a:rPr lang="it-IT" sz="4400" b="0" i="0" u="none" strike="noStrike" cap="none" dirty="0" err="1">
+                <a:solidFill>
+                  <a:srgbClr val="303030"/>
+                </a:solidFill>
+                <a:latin typeface="Helvetica Neue"/>
+                <a:ea typeface="Helvetica Neue"/>
+                <a:cs typeface="Helvetica Neue"/>
+                <a:sym typeface="Helvetica Neue"/>
+              </a:rPr>
+              <a:t>Overview</a:t>
             </a:r>
             <a:endParaRPr dirty="0"/>
           </a:p>
@@ -13523,8 +14044,8 @@
         </p:nvSpPr>
         <p:spPr>
           <a:xfrm>
-            <a:off x="557064" y="2505673"/>
-            <a:ext cx="9292789" cy="6278601"/>
+            <a:off x="557065" y="2824440"/>
+            <a:ext cx="8995150" cy="5539938"/>
           </a:xfrm>
           <a:prstGeom prst="rect">
             <a:avLst/>
@@ -13540,18 +14061,6 @@
           </a:bodyPr>
           <a:lstStyle/>
           <a:p>
-            <a:pPr marL="0" lvl="0" indent="0" algn="l" rtl="0">
-              <a:lnSpc>
-                <a:spcPct val="150000"/>
-              </a:lnSpc>
-              <a:spcBef>
-                <a:spcPts val="0"/>
-              </a:spcBef>
-              <a:spcAft>
-                <a:spcPts val="0"/>
-              </a:spcAft>
-              <a:buNone/>
-            </a:pPr>
             <a:r>
               <a:rPr lang="it-IT" sz="2400" b="1" dirty="0">
                 <a:solidFill>
@@ -13560,9 +14069,8 @@
                 <a:latin typeface="Helvetica Neue"/>
                 <a:ea typeface="Helvetica Neue"/>
                 <a:cs typeface="Helvetica Neue"/>
-                <a:sym typeface="Helvetica Neue"/>
               </a:rPr>
-              <a:t>Con l’applicazione dei concetti di software </a:t>
+              <a:t>With the </a:t>
             </a:r>
             <a:r>
               <a:rPr lang="it-IT" sz="2400" b="1" dirty="0" err="1">
@@ -13572,9 +14080,8 @@
                 <a:latin typeface="Helvetica Neue"/>
                 <a:ea typeface="Helvetica Neue"/>
                 <a:cs typeface="Helvetica Neue"/>
-                <a:sym typeface="Helvetica Neue"/>
               </a:rPr>
-              <a:t>dependability</a:t>
+              <a:t>application</a:t>
             </a:r>
             <a:r>
               <a:rPr lang="it-IT" sz="2400" b="1" dirty="0">
@@ -13584,38 +14091,77 @@
                 <a:latin typeface="Helvetica Neue"/>
                 <a:ea typeface="Helvetica Neue"/>
                 <a:cs typeface="Helvetica Neue"/>
-                <a:sym typeface="Helvetica Neue"/>
               </a:rPr>
-              <a:t> vogliamo introdurre:</a:t>
-            </a:r>
-            <a:endParaRPr sz="2400" b="1" dirty="0">
-              <a:solidFill>
-                <a:srgbClr val="303030"/>
-              </a:solidFill>
-              <a:latin typeface="Helvetica Neue"/>
-              <a:ea typeface="Helvetica Neue"/>
-              <a:cs typeface="Helvetica Neue"/>
-              <a:sym typeface="Helvetica Neue"/>
-            </a:endParaRPr>
+              <a:t> of software </a:t>
+            </a:r>
+            <a:r>
+              <a:rPr lang="it-IT" sz="2400" b="1" dirty="0" err="1">
+                <a:solidFill>
+                  <a:srgbClr val="303030"/>
+                </a:solidFill>
+                <a:latin typeface="Helvetica Neue"/>
+                <a:ea typeface="Helvetica Neue"/>
+                <a:cs typeface="Helvetica Neue"/>
+              </a:rPr>
+              <a:t>dependability</a:t>
+            </a:r>
+            <a:r>
+              <a:rPr lang="it-IT" sz="2400" b="1" dirty="0">
+                <a:solidFill>
+                  <a:srgbClr val="303030"/>
+                </a:solidFill>
+                <a:latin typeface="Helvetica Neue"/>
+                <a:ea typeface="Helvetica Neue"/>
+                <a:cs typeface="Helvetica Neue"/>
+              </a:rPr>
+              <a:t> concepts, </a:t>
+            </a:r>
+            <a:r>
+              <a:rPr lang="it-IT" sz="2400" b="1" dirty="0" err="1">
+                <a:solidFill>
+                  <a:srgbClr val="303030"/>
+                </a:solidFill>
+                <a:latin typeface="Helvetica Neue"/>
+                <a:ea typeface="Helvetica Neue"/>
+                <a:cs typeface="Helvetica Neue"/>
+              </a:rPr>
+              <a:t>we</a:t>
+            </a:r>
+            <a:r>
+              <a:rPr lang="it-IT" sz="2400" b="1" dirty="0">
+                <a:solidFill>
+                  <a:srgbClr val="303030"/>
+                </a:solidFill>
+                <a:latin typeface="Helvetica Neue"/>
+                <a:ea typeface="Helvetica Neue"/>
+                <a:cs typeface="Helvetica Neue"/>
+              </a:rPr>
+              <a:t> </a:t>
+            </a:r>
+            <a:r>
+              <a:rPr lang="it-IT" sz="2400" b="1" dirty="0" err="1">
+                <a:solidFill>
+                  <a:srgbClr val="303030"/>
+                </a:solidFill>
+                <a:latin typeface="Helvetica Neue"/>
+                <a:ea typeface="Helvetica Neue"/>
+                <a:cs typeface="Helvetica Neue"/>
+              </a:rPr>
+              <a:t>want</a:t>
+            </a:r>
+            <a:r>
+              <a:rPr lang="it-IT" sz="2400" b="1" dirty="0">
+                <a:solidFill>
+                  <a:srgbClr val="303030"/>
+                </a:solidFill>
+                <a:latin typeface="Helvetica Neue"/>
+                <a:ea typeface="Helvetica Neue"/>
+                <a:cs typeface="Helvetica Neue"/>
+              </a:rPr>
+              <a:t> to introduce:</a:t>
+            </a:r>
           </a:p>
           <a:p>
-            <a:pPr marL="457200" marR="0" lvl="0" indent="-457200" algn="l" rtl="0">
-              <a:lnSpc>
-                <a:spcPct val="200000"/>
-              </a:lnSpc>
-              <a:spcBef>
-                <a:spcPts val="0"/>
-              </a:spcBef>
-              <a:spcAft>
-                <a:spcPts val="0"/>
-              </a:spcAft>
-              <a:buClr>
-                <a:srgbClr val="303030"/>
-              </a:buClr>
-              <a:buSzPts val="2400"/>
-              <a:buFont typeface="Arial"/>
-              <a:buChar char="•"/>
-            </a:pPr>
             <a:endParaRPr lang="it-IT" sz="2400" b="1" dirty="0">
               <a:solidFill>
                 <a:srgbClr val="303030"/>
@@ -13885,6 +14431,30 @@
                 <a:sym typeface="Helvetica Neue"/>
               </a:rPr>
               <a:t>SonarCloud</a:t>
+            </a:r>
+            <a:r>
+              <a:rPr lang="it-IT" sz="2400" b="1" dirty="0">
+                <a:solidFill>
+                  <a:srgbClr val="303030"/>
+                </a:solidFill>
+                <a:latin typeface="Helvetica Neue"/>
+                <a:ea typeface="Helvetica Neue"/>
+                <a:cs typeface="Helvetica Neue"/>
+                <a:sym typeface="Helvetica Neue"/>
+              </a:rPr>
+              <a:t>, </a:t>
+            </a:r>
+            <a:r>
+              <a:rPr lang="it-IT" sz="2400" b="1" dirty="0" err="1">
+                <a:solidFill>
+                  <a:srgbClr val="303030"/>
+                </a:solidFill>
+                <a:latin typeface="Helvetica Neue"/>
+                <a:ea typeface="Helvetica Neue"/>
+                <a:cs typeface="Helvetica Neue"/>
+                <a:sym typeface="Helvetica Neue"/>
+              </a:rPr>
+              <a:t>Dependabot</a:t>
             </a:r>
             <a:r>
               <a:rPr lang="it-IT" sz="2400" b="1" dirty="0">
@@ -14199,7 +14769,7 @@
         </p:blipFill>
         <p:spPr>
           <a:xfrm>
-            <a:off x="9147743" y="3322155"/>
+            <a:off x="9335477" y="3518098"/>
             <a:ext cx="3124672" cy="3124672"/>
           </a:xfrm>
           <a:prstGeom prst="rect">
@@ -14552,7 +15122,7 @@
         <p:cNvPr id="1" name="Shape 128">
           <a:extLst>
             <a:ext uri="{FF2B5EF4-FFF2-40B4-BE49-F238E27FC236}">
-              <a16:creationId xmlns:a16="http://schemas.microsoft.com/office/drawing/2014/main" id="{C0C661F3-DF14-8747-5029-D63CB5D5CA65}"/>
+              <a16:creationId xmlns:a16="http://schemas.microsoft.com/office/drawing/2014/main" id="{88929286-C56E-FD7C-3368-9569FD0858C7}"/>
             </a:ext>
           </a:extLst>
         </p:cNvPr>
@@ -14569,155 +15139,10 @@
       </p:grpSpPr>
       <p:sp>
         <p:nvSpPr>
-          <p:cNvPr id="19" name="Rettangolo con angoli arrotondati 18">
-            <a:extLst>
-              <a:ext uri="{FF2B5EF4-FFF2-40B4-BE49-F238E27FC236}">
-                <a16:creationId xmlns:a16="http://schemas.microsoft.com/office/drawing/2014/main" id="{999B6A59-9F61-1569-BF8E-C63D698AFE51}"/>
-              </a:ext>
-            </a:extLst>
-          </p:cNvPr>
-          <p:cNvSpPr/>
-          <p:nvPr/>
-        </p:nvSpPr>
-        <p:spPr>
-          <a:xfrm>
-            <a:off x="2606149" y="5366866"/>
-            <a:ext cx="1977081" cy="1998603"/>
-          </a:xfrm>
-          <a:prstGeom prst="roundRect">
-            <a:avLst/>
-          </a:prstGeom>
-          <a:ln>
-            <a:solidFill>
-              <a:srgbClr val="0070C0"/>
-            </a:solidFill>
-          </a:ln>
-        </p:spPr>
-        <p:style>
-          <a:lnRef idx="2">
-            <a:schemeClr val="accent6"/>
-          </a:lnRef>
-          <a:fillRef idx="1">
-            <a:schemeClr val="lt1"/>
-          </a:fillRef>
-          <a:effectRef idx="0">
-            <a:schemeClr val="accent6"/>
-          </a:effectRef>
-          <a:fontRef idx="minor">
-            <a:schemeClr val="dk1"/>
-          </a:fontRef>
-        </p:style>
-        <p:txBody>
-          <a:bodyPr rtlCol="0" anchor="ctr"/>
-          <a:lstStyle/>
-          <a:p>
-            <a:pPr algn="ctr"/>
-            <a:endParaRPr lang="it-IT"/>
-          </a:p>
-        </p:txBody>
-      </p:sp>
-      <p:sp>
-        <p:nvSpPr>
-          <p:cNvPr id="15" name="Rettangolo con angoli arrotondati 14">
-            <a:extLst>
-              <a:ext uri="{FF2B5EF4-FFF2-40B4-BE49-F238E27FC236}">
-                <a16:creationId xmlns:a16="http://schemas.microsoft.com/office/drawing/2014/main" id="{0B969D93-C2F4-513A-CEE3-B2DB5724D77C}"/>
-              </a:ext>
-            </a:extLst>
-          </p:cNvPr>
-          <p:cNvSpPr/>
-          <p:nvPr/>
-        </p:nvSpPr>
-        <p:spPr>
-          <a:xfrm>
-            <a:off x="370703" y="5341120"/>
-            <a:ext cx="1977081" cy="1998603"/>
-          </a:xfrm>
-          <a:prstGeom prst="roundRect">
-            <a:avLst/>
-          </a:prstGeom>
-          <a:ln>
-            <a:solidFill>
-              <a:schemeClr val="accent1">
-                <a:lumMod val="40000"/>
-                <a:lumOff val="60000"/>
-              </a:schemeClr>
-            </a:solidFill>
-          </a:ln>
-        </p:spPr>
-        <p:style>
-          <a:lnRef idx="2">
-            <a:schemeClr val="accent6"/>
-          </a:lnRef>
-          <a:fillRef idx="1">
-            <a:schemeClr val="lt1"/>
-          </a:fillRef>
-          <a:effectRef idx="0">
-            <a:schemeClr val="accent6"/>
-          </a:effectRef>
-          <a:fontRef idx="minor">
-            <a:schemeClr val="dk1"/>
-          </a:fontRef>
-        </p:style>
-        <p:txBody>
-          <a:bodyPr rtlCol="0" anchor="ctr"/>
-          <a:lstStyle/>
-          <a:p>
-            <a:pPr algn="ctr"/>
-            <a:endParaRPr lang="it-IT"/>
-          </a:p>
-        </p:txBody>
-      </p:sp>
-      <p:sp>
-        <p:nvSpPr>
-          <p:cNvPr id="5" name="Rettangolo con angoli arrotondati 4">
-            <a:extLst>
-              <a:ext uri="{FF2B5EF4-FFF2-40B4-BE49-F238E27FC236}">
-                <a16:creationId xmlns:a16="http://schemas.microsoft.com/office/drawing/2014/main" id="{84C48183-9347-B2BF-B187-66ED8CD000C0}"/>
-              </a:ext>
-            </a:extLst>
-          </p:cNvPr>
-          <p:cNvSpPr/>
-          <p:nvPr/>
-        </p:nvSpPr>
-        <p:spPr>
-          <a:xfrm>
-            <a:off x="370703" y="3197885"/>
-            <a:ext cx="1977081" cy="1998603"/>
-          </a:xfrm>
-          <a:prstGeom prst="roundRect">
-            <a:avLst/>
-          </a:prstGeom>
-        </p:spPr>
-        <p:style>
-          <a:lnRef idx="2">
-            <a:schemeClr val="accent6"/>
-          </a:lnRef>
-          <a:fillRef idx="1">
-            <a:schemeClr val="lt1"/>
-          </a:fillRef>
-          <a:effectRef idx="0">
-            <a:schemeClr val="accent6"/>
-          </a:effectRef>
-          <a:fontRef idx="minor">
-            <a:schemeClr val="dk1"/>
-          </a:fontRef>
-        </p:style>
-        <p:txBody>
-          <a:bodyPr rtlCol="0" anchor="ctr"/>
-          <a:lstStyle/>
-          <a:p>
-            <a:pPr algn="ctr"/>
-            <a:endParaRPr lang="it-IT"/>
-          </a:p>
-        </p:txBody>
-      </p:sp>
-      <p:sp>
-        <p:nvSpPr>
           <p:cNvPr id="130" name="Google Shape;130;p3">
             <a:extLst>
               <a:ext uri="{FF2B5EF4-FFF2-40B4-BE49-F238E27FC236}">
-                <a16:creationId xmlns:a16="http://schemas.microsoft.com/office/drawing/2014/main" id="{EE68D346-0F98-EE20-4EAB-5F83DE20E09F}"/>
+                <a16:creationId xmlns:a16="http://schemas.microsoft.com/office/drawing/2014/main" id="{59AC432C-B399-6761-858A-0DC78CEB2351}"/>
               </a:ext>
             </a:extLst>
           </p:cNvPr>
@@ -14774,7 +15199,7 @@
           <p:cNvPr id="131" name="Google Shape;131;p3">
             <a:extLst>
               <a:ext uri="{FF2B5EF4-FFF2-40B4-BE49-F238E27FC236}">
-                <a16:creationId xmlns:a16="http://schemas.microsoft.com/office/drawing/2014/main" id="{07572EB3-9999-3B47-FF53-A387EAE1B599}"/>
+                <a16:creationId xmlns:a16="http://schemas.microsoft.com/office/drawing/2014/main" id="{DA487A27-777B-D5C1-89EA-9AFFD73B913C}"/>
               </a:ext>
             </a:extLst>
           </p:cNvPr>
@@ -14813,7 +15238,7 @@
               <a:buNone/>
             </a:pPr>
             <a:r>
-              <a:rPr lang="it-IT" sz="4500" b="1" dirty="0">
+              <a:rPr lang="it-IT" sz="4500" b="1" i="0" u="none" strike="noStrike" cap="none" dirty="0">
                 <a:solidFill>
                   <a:srgbClr val="FFFFFF"/>
                 </a:solidFill>
@@ -14822,81 +15247,8 @@
                 <a:cs typeface="Arial"/>
                 <a:sym typeface="Arial"/>
               </a:rPr>
-              <a:t>Il sistema</a:t>
-            </a:r>
-            <a:endParaRPr lang="it-IT" sz="4500" b="1" i="0" u="none" strike="noStrike" cap="none" dirty="0">
-              <a:solidFill>
-                <a:srgbClr val="FFFFFF"/>
-              </a:solidFill>
-              <a:latin typeface="Arial"/>
-              <a:ea typeface="Arial"/>
-              <a:cs typeface="Arial"/>
-              <a:sym typeface="Arial"/>
-            </a:endParaRPr>
-          </a:p>
-        </p:txBody>
-      </p:sp>
-      <p:sp>
-        <p:nvSpPr>
-          <p:cNvPr id="139" name="Google Shape;139;p3">
-            <a:extLst>
-              <a:ext uri="{FF2B5EF4-FFF2-40B4-BE49-F238E27FC236}">
-                <a16:creationId xmlns:a16="http://schemas.microsoft.com/office/drawing/2014/main" id="{AFF98C67-8CE1-6232-6F55-C2F18B6A8C73}"/>
-              </a:ext>
-            </a:extLst>
-          </p:cNvPr>
-          <p:cNvSpPr txBox="1"/>
-          <p:nvPr/>
-        </p:nvSpPr>
-        <p:spPr>
-          <a:xfrm>
-            <a:off x="-53200" y="1627303"/>
-            <a:ext cx="13037072" cy="884310"/>
-          </a:xfrm>
-          <a:prstGeom prst="rect">
-            <a:avLst/>
-          </a:prstGeom>
-          <a:noFill/>
-          <a:ln>
-            <a:noFill/>
-          </a:ln>
-        </p:spPr>
-        <p:txBody>
-          <a:bodyPr spcFirstLastPara="1" wrap="square" lIns="91425" tIns="45700" rIns="91425" bIns="45700" anchor="t" anchorCtr="0">
-            <a:noAutofit/>
-          </a:bodyPr>
-          <a:lstStyle/>
-          <a:p>
-            <a:pPr marL="0" marR="0" lvl="0" indent="0" algn="ctr" rtl="0">
-              <a:lnSpc>
-                <a:spcPct val="90000"/>
-              </a:lnSpc>
-              <a:spcBef>
-                <a:spcPts val="0"/>
-              </a:spcBef>
-              <a:spcAft>
-                <a:spcPts val="0"/>
-              </a:spcAft>
-              <a:buClr>
-                <a:srgbClr val="303030"/>
-              </a:buClr>
-              <a:buSzPts val="4400"/>
-              <a:buFont typeface="Helvetica Neue"/>
-              <a:buNone/>
-            </a:pPr>
-            <a:r>
-              <a:rPr lang="it-IT" sz="4400" b="0" i="0" u="none" strike="noStrike" cap="none" dirty="0">
-                <a:solidFill>
-                  <a:srgbClr val="303030"/>
-                </a:solidFill>
-                <a:latin typeface="Helvetica Neue"/>
-                <a:ea typeface="Helvetica Neue"/>
-                <a:cs typeface="Helvetica Neue"/>
-                <a:sym typeface="Helvetica Neue"/>
-              </a:rPr>
-              <a:t>Tecnologie utilizzate</a:t>
-            </a:r>
-            <a:endParaRPr dirty="0"/>
+              <a:t>Reliability</a:t>
+            </a:r>
           </a:p>
         </p:txBody>
       </p:sp>
@@ -14905,7 +15257,7 @@
           <p:cNvPr id="140" name="Google Shape;140;p3" descr="Immagine che contiene Elementi grafici, Blu elettrico, Carattere, logo&#10;&#10;Il contenuto generato dall'IA potrebbe non essere corretto.">
             <a:extLst>
               <a:ext uri="{FF2B5EF4-FFF2-40B4-BE49-F238E27FC236}">
-                <a16:creationId xmlns:a16="http://schemas.microsoft.com/office/drawing/2014/main" id="{A15CC73B-2E33-4D3F-A323-1AD436BB63FA}"/>
+                <a16:creationId xmlns:a16="http://schemas.microsoft.com/office/drawing/2014/main" id="{07A571CD-0081-E330-EF87-6CF2FD883661}"/>
               </a:ext>
             </a:extLst>
           </p:cNvPr>
@@ -14938,7 +15290,7 @@
           <p:cNvPr id="141" name="Google Shape;141;p3" descr="Immagine che contiene Elementi grafici, Blu elettrico, Carattere, logo&#10;&#10;Il contenuto generato dall'IA potrebbe non essere corretto.">
             <a:extLst>
               <a:ext uri="{FF2B5EF4-FFF2-40B4-BE49-F238E27FC236}">
-                <a16:creationId xmlns:a16="http://schemas.microsoft.com/office/drawing/2014/main" id="{D708910C-C701-DDDA-6DB3-D697D19CFCAB}"/>
+                <a16:creationId xmlns:a16="http://schemas.microsoft.com/office/drawing/2014/main" id="{BEC69FCF-A25A-7682-A153-0AB553A628F7}"/>
               </a:ext>
             </a:extLst>
           </p:cNvPr>
@@ -14972,230 +15324,12 @@
           </a:ln>
         </p:spPr>
       </p:pic>
-      <p:pic>
-        <p:nvPicPr>
-          <p:cNvPr id="4" name="Immagine 3" descr="Immagine che contiene verde&#10;&#10;Il contenuto generato dall'IA potrebbe non essere corretto.">
-            <a:extLst>
-              <a:ext uri="{FF2B5EF4-FFF2-40B4-BE49-F238E27FC236}">
-                <a16:creationId xmlns:a16="http://schemas.microsoft.com/office/drawing/2014/main" id="{4F6323F9-737F-FF2E-DBFA-5B8258B518C4}"/>
-              </a:ext>
-            </a:extLst>
-          </p:cNvPr>
-          <p:cNvPicPr>
-            <a:picLocks noChangeAspect="1"/>
-          </p:cNvPicPr>
-          <p:nvPr/>
-        </p:nvPicPr>
-        <p:blipFill>
-          <a:blip r:embed="rId4"/>
-          <a:stretch>
-            <a:fillRect/>
-          </a:stretch>
-        </p:blipFill>
-        <p:spPr>
-          <a:xfrm>
-            <a:off x="641852" y="3533624"/>
-            <a:ext cx="1358093" cy="1358093"/>
-          </a:xfrm>
-          <a:prstGeom prst="rect">
-            <a:avLst/>
-          </a:prstGeom>
-        </p:spPr>
-      </p:pic>
-      <p:sp>
-        <p:nvSpPr>
-          <p:cNvPr id="6" name="Rettangolo con angoli arrotondati 5">
-            <a:extLst>
-              <a:ext uri="{FF2B5EF4-FFF2-40B4-BE49-F238E27FC236}">
-                <a16:creationId xmlns:a16="http://schemas.microsoft.com/office/drawing/2014/main" id="{07A584F1-488A-C70B-47A8-D6B8C0D351AC}"/>
-              </a:ext>
-            </a:extLst>
-          </p:cNvPr>
-          <p:cNvSpPr/>
-          <p:nvPr/>
-        </p:nvSpPr>
-        <p:spPr>
-          <a:xfrm>
-            <a:off x="2569769" y="3213368"/>
-            <a:ext cx="2054082" cy="1998603"/>
-          </a:xfrm>
-          <a:prstGeom prst="roundRect">
-            <a:avLst/>
-          </a:prstGeom>
-          <a:ln>
-            <a:solidFill>
-              <a:srgbClr val="00B0F0"/>
-            </a:solidFill>
-          </a:ln>
-        </p:spPr>
-        <p:style>
-          <a:lnRef idx="2">
-            <a:schemeClr val="accent6"/>
-          </a:lnRef>
-          <a:fillRef idx="1">
-            <a:schemeClr val="lt1"/>
-          </a:fillRef>
-          <a:effectRef idx="0">
-            <a:schemeClr val="accent6"/>
-          </a:effectRef>
-          <a:fontRef idx="minor">
-            <a:schemeClr val="dk1"/>
-          </a:fontRef>
-        </p:style>
-        <p:txBody>
-          <a:bodyPr rtlCol="0" anchor="ctr"/>
-          <a:lstStyle/>
-          <a:p>
-            <a:pPr algn="ctr"/>
-            <a:endParaRPr lang="it-IT"/>
-          </a:p>
-        </p:txBody>
-      </p:sp>
-      <p:pic>
-        <p:nvPicPr>
-          <p:cNvPr id="8" name="Immagine 7" descr="Immagine che contiene Carattere, Elementi grafici, logo, grafica&#10;&#10;Il contenuto generato dall'IA potrebbe non essere corretto.">
-            <a:extLst>
-              <a:ext uri="{FF2B5EF4-FFF2-40B4-BE49-F238E27FC236}">
-                <a16:creationId xmlns:a16="http://schemas.microsoft.com/office/drawing/2014/main" id="{E9B45255-5BFD-FE08-F1ED-8C7BE245DBAE}"/>
-              </a:ext>
-            </a:extLst>
-          </p:cNvPr>
-          <p:cNvPicPr>
-            <a:picLocks noChangeAspect="1"/>
-          </p:cNvPicPr>
-          <p:nvPr/>
-        </p:nvPicPr>
-        <p:blipFill>
-          <a:blip r:embed="rId5"/>
-          <a:stretch>
-            <a:fillRect/>
-          </a:stretch>
-        </p:blipFill>
-        <p:spPr>
-          <a:xfrm>
-            <a:off x="2711695" y="3861232"/>
-            <a:ext cx="1765987" cy="924199"/>
-          </a:xfrm>
-          <a:prstGeom prst="rect">
-            <a:avLst/>
-          </a:prstGeom>
-        </p:spPr>
-      </p:pic>
-      <p:pic>
-        <p:nvPicPr>
-          <p:cNvPr id="14" name="Immagine 13" descr="Immagine che contiene Carattere, Elementi grafici, cerchio, simbolo&#10;&#10;Il contenuto generato dall'IA potrebbe non essere corretto.">
-            <a:extLst>
-              <a:ext uri="{FF2B5EF4-FFF2-40B4-BE49-F238E27FC236}">
-                <a16:creationId xmlns:a16="http://schemas.microsoft.com/office/drawing/2014/main" id="{0239C7AC-E505-91D4-D13D-B592A81F292C}"/>
-              </a:ext>
-            </a:extLst>
-          </p:cNvPr>
-          <p:cNvPicPr>
-            <a:picLocks noChangeAspect="1"/>
-          </p:cNvPicPr>
-          <p:nvPr/>
-        </p:nvPicPr>
-        <p:blipFill>
-          <a:blip r:embed="rId6"/>
-          <a:stretch>
-            <a:fillRect/>
-          </a:stretch>
-        </p:blipFill>
-        <p:spPr>
-          <a:xfrm>
-            <a:off x="838676" y="5708645"/>
-            <a:ext cx="1078749" cy="1315046"/>
-          </a:xfrm>
-          <a:prstGeom prst="rect">
-            <a:avLst/>
-          </a:prstGeom>
-        </p:spPr>
-      </p:pic>
-      <p:pic>
-        <p:nvPicPr>
-          <p:cNvPr id="18" name="Immagine 17" descr="Immagine che contiene logo, simbolo, Elementi grafici, Carattere&#10;&#10;Il contenuto generato dall'IA potrebbe non essere corretto.">
-            <a:extLst>
-              <a:ext uri="{FF2B5EF4-FFF2-40B4-BE49-F238E27FC236}">
-                <a16:creationId xmlns:a16="http://schemas.microsoft.com/office/drawing/2014/main" id="{6A201920-77FD-1FA4-4A3B-8A08888CC506}"/>
-              </a:ext>
-            </a:extLst>
-          </p:cNvPr>
-          <p:cNvPicPr>
-            <a:picLocks noChangeAspect="1"/>
-          </p:cNvPicPr>
-          <p:nvPr/>
-        </p:nvPicPr>
-        <p:blipFill>
-          <a:blip r:embed="rId7"/>
-          <a:stretch>
-            <a:fillRect/>
-          </a:stretch>
-        </p:blipFill>
-        <p:spPr>
-          <a:xfrm>
-            <a:off x="2711696" y="5483174"/>
-            <a:ext cx="1765986" cy="1765986"/>
-          </a:xfrm>
-          <a:prstGeom prst="rect">
-            <a:avLst/>
-          </a:prstGeom>
-        </p:spPr>
-      </p:pic>
-      <p:sp>
-        <p:nvSpPr>
-          <p:cNvPr id="20" name="Rettangolo con angoli arrotondati 19">
-            <a:extLst>
-              <a:ext uri="{FF2B5EF4-FFF2-40B4-BE49-F238E27FC236}">
-                <a16:creationId xmlns:a16="http://schemas.microsoft.com/office/drawing/2014/main" id="{380A4769-54F0-B618-BD9F-D957E6ABC295}"/>
-              </a:ext>
-            </a:extLst>
-          </p:cNvPr>
-          <p:cNvSpPr/>
-          <p:nvPr/>
-        </p:nvSpPr>
-        <p:spPr>
-          <a:xfrm>
-            <a:off x="4841594" y="3213368"/>
-            <a:ext cx="7324529" cy="4152101"/>
-          </a:xfrm>
-          <a:prstGeom prst="roundRect">
-            <a:avLst/>
-          </a:prstGeom>
-          <a:ln>
-            <a:solidFill>
-              <a:srgbClr val="FF0000"/>
-            </a:solidFill>
-          </a:ln>
-        </p:spPr>
-        <p:style>
-          <a:lnRef idx="2">
-            <a:schemeClr val="accent6"/>
-          </a:lnRef>
-          <a:fillRef idx="1">
-            <a:schemeClr val="lt1"/>
-          </a:fillRef>
-          <a:effectRef idx="0">
-            <a:schemeClr val="accent6"/>
-          </a:effectRef>
-          <a:fontRef idx="minor">
-            <a:schemeClr val="dk1"/>
-          </a:fontRef>
-        </p:style>
-        <p:txBody>
-          <a:bodyPr rtlCol="0" anchor="ctr"/>
-          <a:lstStyle/>
-          <a:p>
-            <a:pPr algn="ctr"/>
-            <a:endParaRPr lang="it-IT"/>
-          </a:p>
-        </p:txBody>
-      </p:sp>
       <p:sp>
         <p:nvSpPr>
           <p:cNvPr id="2" name="Google Shape;112;p2">
             <a:extLst>
               <a:ext uri="{FF2B5EF4-FFF2-40B4-BE49-F238E27FC236}">
-                <a16:creationId xmlns:a16="http://schemas.microsoft.com/office/drawing/2014/main" id="{1D3669B8-1E59-CDA4-F3C0-3D531B3518BC}"/>
+                <a16:creationId xmlns:a16="http://schemas.microsoft.com/office/drawing/2014/main" id="{AAD28CF4-9450-99B1-F316-B712BFCD669A}"/>
               </a:ext>
             </a:extLst>
           </p:cNvPr>
@@ -15252,7 +15386,7 @@
           <p:cNvPr id="3" name="Google Shape;115;p2">
             <a:extLst>
               <a:ext uri="{FF2B5EF4-FFF2-40B4-BE49-F238E27FC236}">
-                <a16:creationId xmlns:a16="http://schemas.microsoft.com/office/drawing/2014/main" id="{85623745-6340-B9DD-DC3E-DABBA9426ED8}"/>
+                <a16:creationId xmlns:a16="http://schemas.microsoft.com/office/drawing/2014/main" id="{D558184F-894E-2326-82E5-0C12F3E7FA8A}"/>
               </a:ext>
             </a:extLst>
           </p:cNvPr>
@@ -15390,10 +15524,10 @@
       </p:sp>
       <p:sp>
         <p:nvSpPr>
-          <p:cNvPr id="7" name="Google Shape;116;p2">
+          <p:cNvPr id="5" name="Google Shape;116;p2">
             <a:extLst>
               <a:ext uri="{FF2B5EF4-FFF2-40B4-BE49-F238E27FC236}">
-                <a16:creationId xmlns:a16="http://schemas.microsoft.com/office/drawing/2014/main" id="{00955D5A-BEF4-8415-2B0D-40BBC4A94BF8}"/>
+                <a16:creationId xmlns:a16="http://schemas.microsoft.com/office/drawing/2014/main" id="{EA2F14D0-92CB-BA32-CEE9-780378BE07D8}"/>
               </a:ext>
             </a:extLst>
           </p:cNvPr>
@@ -15440,7 +15574,7 @@
                 <a:ea typeface="Play"/>
                 <a:cs typeface="Play"/>
                 <a:sym typeface="Play"/>
-                <a:hlinkClick r:id="rId8">
+                <a:hlinkClick r:id="rId4">
                   <a:extLst>
                     <a:ext uri="{A12FA001-AC4F-418D-AE19-62706E023703}">
                       <ahyp:hlinkClr xmlns:ahyp="http://schemas.microsoft.com/office/drawing/2018/hyperlinkcolor" val="tx"/>
@@ -15458,7 +15592,7 @@
               <a:ea typeface="Arial"/>
               <a:cs typeface="Arial"/>
               <a:sym typeface="Arial"/>
-              <a:hlinkClick r:id="rId8">
+              <a:hlinkClick r:id="rId4">
                 <a:extLst>
                   <a:ext uri="{A12FA001-AC4F-418D-AE19-62706E023703}">
                     <ahyp:hlinkClr xmlns:ahyp="http://schemas.microsoft.com/office/drawing/2018/hyperlinkcolor" val="tx"/>
@@ -15471,10 +15605,10 @@
       </p:sp>
       <p:pic>
         <p:nvPicPr>
-          <p:cNvPr id="10" name="Google Shape;117;p2" descr="email.png">
+          <p:cNvPr id="6" name="Google Shape;117;p2" descr="email.png">
             <a:extLst>
               <a:ext uri="{FF2B5EF4-FFF2-40B4-BE49-F238E27FC236}">
-                <a16:creationId xmlns:a16="http://schemas.microsoft.com/office/drawing/2014/main" id="{83302532-1D1C-DCDA-B010-9521EC424F31}"/>
+                <a16:creationId xmlns:a16="http://schemas.microsoft.com/office/drawing/2014/main" id="{261832CA-5D20-DA53-8BF6-D087B8F41A85}"/>
               </a:ext>
             </a:extLst>
           </p:cNvPr>
@@ -15482,7 +15616,7 @@
           <p:nvPr/>
         </p:nvPicPr>
         <p:blipFill rotWithShape="1">
-          <a:blip r:embed="rId9">
+          <a:blip r:embed="rId5">
             <a:alphaModFix/>
           </a:blip>
           <a:srcRect/>
@@ -15504,10 +15638,10 @@
       </p:pic>
       <p:pic>
         <p:nvPicPr>
-          <p:cNvPr id="11" name="Elemento grafico 10">
+          <p:cNvPr id="12" name="Immagine 11" descr="Immagine che contiene testo, schermata, Carattere, logo&#10;&#10;Il contenuto generato dall'IA potrebbe non essere corretto.">
             <a:extLst>
               <a:ext uri="{FF2B5EF4-FFF2-40B4-BE49-F238E27FC236}">
-                <a16:creationId xmlns:a16="http://schemas.microsoft.com/office/drawing/2014/main" id="{BE7F469E-FD7F-7D40-BD60-3136C5A41349}"/>
+                <a16:creationId xmlns:a16="http://schemas.microsoft.com/office/drawing/2014/main" id="{F2F96D8C-1804-B8D7-B0AD-04E663FB320B}"/>
               </a:ext>
             </a:extLst>
           </p:cNvPr>
@@ -15517,21 +15651,15 @@
           <p:nvPr/>
         </p:nvPicPr>
         <p:blipFill>
-          <a:blip r:embed="rId10">
-            <a:extLst>
-              <a:ext uri="{96DAC541-7B7A-43D3-8B79-37D633B846F1}">
-                <asvg:svgBlip xmlns:asvg="http://schemas.microsoft.com/office/drawing/2016/SVG/main" r:embed="rId11"/>
-              </a:ext>
-            </a:extLst>
-          </a:blip>
+          <a:blip r:embed="rId6"/>
           <a:stretch>
             <a:fillRect/>
           </a:stretch>
         </p:blipFill>
         <p:spPr>
           <a:xfrm>
-            <a:off x="5166651" y="3213368"/>
-            <a:ext cx="1998604" cy="1998604"/>
+            <a:off x="535112" y="2970607"/>
+            <a:ext cx="3351361" cy="3845571"/>
           </a:xfrm>
           <a:prstGeom prst="rect">
             <a:avLst/>
@@ -15540,10 +15668,10 @@
       </p:pic>
       <p:pic>
         <p:nvPicPr>
-          <p:cNvPr id="13" name="Immagine 12" descr="Immagine che contiene Elementi grafici, simbolo, clipart, logo&#10;&#10;Il contenuto generato dall'IA potrebbe non essere corretto.">
+          <p:cNvPr id="14" name="Immagine 13" descr="Immagine che contiene testo, schermata, biglietto da visita, Carattere&#10;&#10;Il contenuto generato dall'IA potrebbe non essere corretto.">
             <a:extLst>
               <a:ext uri="{FF2B5EF4-FFF2-40B4-BE49-F238E27FC236}">
-                <a16:creationId xmlns:a16="http://schemas.microsoft.com/office/drawing/2014/main" id="{0485F1F0-F484-BE48-DCF4-A16292079E36}"/>
+                <a16:creationId xmlns:a16="http://schemas.microsoft.com/office/drawing/2014/main" id="{88434C42-B8E6-16E0-AA00-9A34D825C0AB}"/>
               </a:ext>
             </a:extLst>
           </p:cNvPr>
@@ -15553,15 +15681,15 @@
           <p:nvPr/>
         </p:nvPicPr>
         <p:blipFill>
-          <a:blip r:embed="rId12"/>
+          <a:blip r:embed="rId7"/>
           <a:stretch>
             <a:fillRect/>
           </a:stretch>
         </p:blipFill>
         <p:spPr>
           <a:xfrm>
-            <a:off x="7504556" y="3368262"/>
-            <a:ext cx="1998604" cy="1998604"/>
+            <a:off x="4804768" y="2952805"/>
+            <a:ext cx="3351360" cy="3863373"/>
           </a:xfrm>
           <a:prstGeom prst="rect">
             <a:avLst/>
@@ -15570,10 +15698,10 @@
       </p:pic>
       <p:pic>
         <p:nvPicPr>
-          <p:cNvPr id="17" name="Immagine 16" descr="Immagine che contiene clipart, Elementi grafici, cartone animato, illustrazione&#10;&#10;Il contenuto generato dall'IA potrebbe non essere corretto.">
+          <p:cNvPr id="16" name="Immagine 15" descr="Immagine che contiene testo, schermata, Carattere, biglietto da visita&#10;&#10;Il contenuto generato dall'IA potrebbe non essere corretto.">
             <a:extLst>
               <a:ext uri="{FF2B5EF4-FFF2-40B4-BE49-F238E27FC236}">
-                <a16:creationId xmlns:a16="http://schemas.microsoft.com/office/drawing/2014/main" id="{23EB4627-E0C2-005E-05B9-2397C8082ED1}"/>
+                <a16:creationId xmlns:a16="http://schemas.microsoft.com/office/drawing/2014/main" id="{35CCAE59-7E1B-B484-BF22-788888A77543}"/>
               </a:ext>
             </a:extLst>
           </p:cNvPr>
@@ -15583,15 +15711,15 @@
           <p:nvPr/>
         </p:nvPicPr>
         <p:blipFill>
-          <a:blip r:embed="rId13"/>
+          <a:blip r:embed="rId8"/>
           <a:stretch>
             <a:fillRect/>
           </a:stretch>
         </p:blipFill>
         <p:spPr>
           <a:xfrm>
-            <a:off x="10021841" y="3591947"/>
-            <a:ext cx="1625600" cy="1625600"/>
+            <a:off x="9074425" y="2952805"/>
+            <a:ext cx="3351359" cy="3858675"/>
           </a:xfrm>
           <a:prstGeom prst="rect">
             <a:avLst/>
@@ -15601,7 +15729,7 @@
     </p:spTree>
     <p:extLst>
       <p:ext uri="{BB962C8B-B14F-4D97-AF65-F5344CB8AC3E}">
-        <p14:creationId xmlns:p14="http://schemas.microsoft.com/office/powerpoint/2010/main" val="3009475373"/>
+        <p14:creationId xmlns:p14="http://schemas.microsoft.com/office/powerpoint/2010/main" val="308861863"/>
       </p:ext>
     </p:extLst>
   </p:cSld>
@@ -15624,6 +15752,1890 @@
 </file>
 
 <file path=ppt/slides/slide5.xml><?xml version="1.0" encoding="utf-8"?>
+<p:sld xmlns:a="http://schemas.openxmlformats.org/drawingml/2006/main" xmlns:r="http://schemas.openxmlformats.org/officeDocument/2006/relationships" xmlns:p="http://schemas.openxmlformats.org/presentationml/2006/main">
+  <p:cSld>
+    <p:spTree>
+      <p:nvGrpSpPr>
+        <p:cNvPr id="1" name="Shape 128">
+          <a:extLst>
+            <a:ext uri="{FF2B5EF4-FFF2-40B4-BE49-F238E27FC236}">
+              <a16:creationId xmlns:a16="http://schemas.microsoft.com/office/drawing/2014/main" id="{E2B2AD55-8E33-12FD-D82D-60B56CEE5DEC}"/>
+            </a:ext>
+          </a:extLst>
+        </p:cNvPr>
+        <p:cNvGrpSpPr/>
+        <p:nvPr/>
+      </p:nvGrpSpPr>
+      <p:grpSpPr>
+        <a:xfrm>
+          <a:off x="0" y="0"/>
+          <a:ext cx="0" cy="0"/>
+          <a:chOff x="0" y="0"/>
+          <a:chExt cx="0" cy="0"/>
+        </a:xfrm>
+      </p:grpSpPr>
+      <p:sp>
+        <p:nvSpPr>
+          <p:cNvPr id="130" name="Google Shape;130;p3">
+            <a:extLst>
+              <a:ext uri="{FF2B5EF4-FFF2-40B4-BE49-F238E27FC236}">
+                <a16:creationId xmlns:a16="http://schemas.microsoft.com/office/drawing/2014/main" id="{4342111C-FE9E-2956-560C-D6FD2C3F1CF5}"/>
+              </a:ext>
+            </a:extLst>
+          </p:cNvPr>
+          <p:cNvSpPr/>
+          <p:nvPr/>
+        </p:nvSpPr>
+        <p:spPr>
+          <a:xfrm>
+            <a:off x="-6928" y="1890"/>
+            <a:ext cx="13018657" cy="1358090"/>
+          </a:xfrm>
+          <a:prstGeom prst="rect">
+            <a:avLst/>
+          </a:prstGeom>
+          <a:solidFill>
+            <a:srgbClr val="00A1FF"/>
+          </a:solidFill>
+          <a:ln>
+            <a:noFill/>
+          </a:ln>
+        </p:spPr>
+        <p:txBody>
+          <a:bodyPr spcFirstLastPara="1" wrap="square" lIns="50800" tIns="50800" rIns="50800" bIns="50800" anchor="ctr" anchorCtr="0">
+            <a:noAutofit/>
+          </a:bodyPr>
+          <a:lstStyle/>
+          <a:p>
+            <a:pPr marL="0" marR="0" lvl="0" indent="0" algn="ctr" rtl="0">
+              <a:lnSpc>
+                <a:spcPct val="100000"/>
+              </a:lnSpc>
+              <a:spcBef>
+                <a:spcPts val="0"/>
+              </a:spcBef>
+              <a:spcAft>
+                <a:spcPts val="0"/>
+              </a:spcAft>
+              <a:buNone/>
+            </a:pPr>
+            <a:endParaRPr sz="1800" b="0" i="0" u="none" strike="noStrike" cap="none">
+              <a:solidFill>
+                <a:schemeClr val="dk1"/>
+              </a:solidFill>
+              <a:latin typeface="Arial"/>
+              <a:ea typeface="Arial"/>
+              <a:cs typeface="Arial"/>
+              <a:sym typeface="Arial"/>
+            </a:endParaRPr>
+          </a:p>
+        </p:txBody>
+      </p:sp>
+      <p:sp>
+        <p:nvSpPr>
+          <p:cNvPr id="131" name="Google Shape;131;p3">
+            <a:extLst>
+              <a:ext uri="{FF2B5EF4-FFF2-40B4-BE49-F238E27FC236}">
+                <a16:creationId xmlns:a16="http://schemas.microsoft.com/office/drawing/2014/main" id="{B216C0F8-41AB-32B6-A86A-ACF764EB6E9D}"/>
+              </a:ext>
+            </a:extLst>
+          </p:cNvPr>
+          <p:cNvSpPr txBox="1"/>
+          <p:nvPr/>
+        </p:nvSpPr>
+        <p:spPr>
+          <a:xfrm>
+            <a:off x="557064" y="397333"/>
+            <a:ext cx="11609060" cy="677301"/>
+          </a:xfrm>
+          <a:prstGeom prst="rect">
+            <a:avLst/>
+          </a:prstGeom>
+          <a:noFill/>
+          <a:ln>
+            <a:noFill/>
+          </a:ln>
+        </p:spPr>
+        <p:txBody>
+          <a:bodyPr spcFirstLastPara="1" wrap="square" lIns="50800" tIns="50800" rIns="50800" bIns="50800" anchor="b" anchorCtr="0">
+            <a:spAutoFit/>
+          </a:bodyPr>
+          <a:lstStyle/>
+          <a:p>
+            <a:pPr marL="0" marR="0" lvl="0" indent="0" algn="l" rtl="0">
+              <a:lnSpc>
+                <a:spcPct val="80000"/>
+              </a:lnSpc>
+              <a:spcBef>
+                <a:spcPts val="0"/>
+              </a:spcBef>
+              <a:spcAft>
+                <a:spcPts val="0"/>
+              </a:spcAft>
+              <a:buNone/>
+            </a:pPr>
+            <a:r>
+              <a:rPr lang="it-IT" sz="4500" b="1" i="0" u="none" strike="noStrike" cap="none" dirty="0">
+                <a:solidFill>
+                  <a:srgbClr val="FFFFFF"/>
+                </a:solidFill>
+                <a:latin typeface="Arial"/>
+                <a:ea typeface="Arial"/>
+                <a:cs typeface="Arial"/>
+                <a:sym typeface="Arial"/>
+              </a:rPr>
+              <a:t>Reliability</a:t>
+            </a:r>
+          </a:p>
+        </p:txBody>
+      </p:sp>
+      <p:pic>
+        <p:nvPicPr>
+          <p:cNvPr id="140" name="Google Shape;140;p3" descr="Immagine che contiene Elementi grafici, Blu elettrico, Carattere, logo&#10;&#10;Il contenuto generato dall'IA potrebbe non essere corretto.">
+            <a:extLst>
+              <a:ext uri="{FF2B5EF4-FFF2-40B4-BE49-F238E27FC236}">
+                <a16:creationId xmlns:a16="http://schemas.microsoft.com/office/drawing/2014/main" id="{FFCED534-E727-DE1E-A097-A84B33A0F1D3}"/>
+              </a:ext>
+            </a:extLst>
+          </p:cNvPr>
+          <p:cNvPicPr preferRelativeResize="0"/>
+          <p:nvPr/>
+        </p:nvPicPr>
+        <p:blipFill rotWithShape="1">
+          <a:blip r:embed="rId3">
+            <a:alphaModFix/>
+          </a:blip>
+          <a:srcRect/>
+          <a:stretch/>
+        </p:blipFill>
+        <p:spPr>
+          <a:xfrm>
+            <a:off x="11269071" y="102585"/>
+            <a:ext cx="1156713" cy="1156713"/>
+          </a:xfrm>
+          <a:prstGeom prst="rect">
+            <a:avLst/>
+          </a:prstGeom>
+          <a:noFill/>
+          <a:ln>
+            <a:noFill/>
+          </a:ln>
+        </p:spPr>
+      </p:pic>
+      <p:pic>
+        <p:nvPicPr>
+          <p:cNvPr id="141" name="Google Shape;141;p3" descr="Immagine che contiene Elementi grafici, Blu elettrico, Carattere, logo&#10;&#10;Il contenuto generato dall'IA potrebbe non essere corretto.">
+            <a:extLst>
+              <a:ext uri="{FF2B5EF4-FFF2-40B4-BE49-F238E27FC236}">
+                <a16:creationId xmlns:a16="http://schemas.microsoft.com/office/drawing/2014/main" id="{21763EA1-509D-1968-F98C-A9CEBC9803E8}"/>
+              </a:ext>
+            </a:extLst>
+          </p:cNvPr>
+          <p:cNvPicPr preferRelativeResize="0"/>
+          <p:nvPr/>
+        </p:nvPicPr>
+        <p:blipFill rotWithShape="1">
+          <a:blip r:embed="rId3">
+            <a:alphaModFix/>
+          </a:blip>
+          <a:srcRect/>
+          <a:stretch/>
+        </p:blipFill>
+        <p:spPr>
+          <a:xfrm>
+            <a:off x="11269071" y="102585"/>
+            <a:ext cx="1156713" cy="1156713"/>
+          </a:xfrm>
+          <a:prstGeom prst="rect">
+            <a:avLst/>
+          </a:prstGeom>
+          <a:noFill/>
+          <a:ln w="28575" cap="flat" cmpd="sng">
+            <a:solidFill>
+              <a:schemeClr val="dk1"/>
+            </a:solidFill>
+            <a:prstDash val="solid"/>
+            <a:round/>
+            <a:headEnd type="none" w="sm" len="sm"/>
+            <a:tailEnd type="none" w="sm" len="sm"/>
+          </a:ln>
+        </p:spPr>
+      </p:pic>
+      <p:sp>
+        <p:nvSpPr>
+          <p:cNvPr id="2" name="Google Shape;112;p2">
+            <a:extLst>
+              <a:ext uri="{FF2B5EF4-FFF2-40B4-BE49-F238E27FC236}">
+                <a16:creationId xmlns:a16="http://schemas.microsoft.com/office/drawing/2014/main" id="{2834BE18-F42D-36B6-9C98-5B4FAFDBEAC4}"/>
+              </a:ext>
+            </a:extLst>
+          </p:cNvPr>
+          <p:cNvSpPr/>
+          <p:nvPr/>
+        </p:nvSpPr>
+        <p:spPr>
+          <a:xfrm>
+            <a:off x="-6928" y="8409003"/>
+            <a:ext cx="13018657" cy="1358093"/>
+          </a:xfrm>
+          <a:prstGeom prst="rect">
+            <a:avLst/>
+          </a:prstGeom>
+          <a:solidFill>
+            <a:srgbClr val="00A1FF"/>
+          </a:solidFill>
+          <a:ln>
+            <a:noFill/>
+          </a:ln>
+        </p:spPr>
+        <p:txBody>
+          <a:bodyPr spcFirstLastPara="1" wrap="square" lIns="50800" tIns="50800" rIns="50800" bIns="50800" anchor="ctr" anchorCtr="0">
+            <a:noAutofit/>
+          </a:bodyPr>
+          <a:lstStyle/>
+          <a:p>
+            <a:pPr marL="0" marR="0" lvl="0" indent="0" algn="ctr" rtl="0">
+              <a:lnSpc>
+                <a:spcPct val="100000"/>
+              </a:lnSpc>
+              <a:spcBef>
+                <a:spcPts val="0"/>
+              </a:spcBef>
+              <a:spcAft>
+                <a:spcPts val="0"/>
+              </a:spcAft>
+              <a:buNone/>
+            </a:pPr>
+            <a:endParaRPr sz="1800" b="0" i="0" u="none" strike="noStrike" cap="none">
+              <a:solidFill>
+                <a:schemeClr val="dk1"/>
+              </a:solidFill>
+              <a:latin typeface="Arial"/>
+              <a:ea typeface="Arial"/>
+              <a:cs typeface="Arial"/>
+              <a:sym typeface="Arial"/>
+            </a:endParaRPr>
+          </a:p>
+        </p:txBody>
+      </p:sp>
+      <p:sp>
+        <p:nvSpPr>
+          <p:cNvPr id="3" name="Google Shape;115;p2">
+            <a:extLst>
+              <a:ext uri="{FF2B5EF4-FFF2-40B4-BE49-F238E27FC236}">
+                <a16:creationId xmlns:a16="http://schemas.microsoft.com/office/drawing/2014/main" id="{7C3A4203-EBE9-E0C1-7578-DF244047387F}"/>
+              </a:ext>
+            </a:extLst>
+          </p:cNvPr>
+          <p:cNvSpPr txBox="1"/>
+          <p:nvPr/>
+        </p:nvSpPr>
+        <p:spPr>
+          <a:xfrm>
+            <a:off x="6338459" y="8538153"/>
+            <a:ext cx="6121690" cy="1099788"/>
+          </a:xfrm>
+          <a:prstGeom prst="rect">
+            <a:avLst/>
+          </a:prstGeom>
+          <a:noFill/>
+          <a:ln>
+            <a:noFill/>
+          </a:ln>
+        </p:spPr>
+        <p:txBody>
+          <a:bodyPr spcFirstLastPara="1" wrap="square" lIns="50800" tIns="50800" rIns="50800" bIns="50800" anchor="ctr" anchorCtr="0">
+            <a:spAutoFit/>
+          </a:bodyPr>
+          <a:lstStyle/>
+          <a:p>
+            <a:pPr marL="0" marR="0" lvl="0" indent="0" algn="r" rtl="0">
+              <a:lnSpc>
+                <a:spcPct val="120000"/>
+              </a:lnSpc>
+              <a:spcBef>
+                <a:spcPts val="0"/>
+              </a:spcBef>
+              <a:spcAft>
+                <a:spcPts val="0"/>
+              </a:spcAft>
+              <a:buNone/>
+            </a:pPr>
+            <a:r>
+              <a:rPr lang="it-IT" sz="1800" b="1" i="0" u="none" strike="noStrike" cap="none" dirty="0" err="1">
+                <a:solidFill>
+                  <a:srgbClr val="FFFFFF"/>
+                </a:solidFill>
+                <a:latin typeface="Arial"/>
+                <a:ea typeface="Arial"/>
+                <a:cs typeface="Arial"/>
+                <a:sym typeface="Arial"/>
+              </a:rPr>
+              <a:t>PlayWise</a:t>
+            </a:r>
+            <a:endParaRPr sz="1800" b="0" i="0" u="none" strike="noStrike" cap="none" dirty="0">
+              <a:solidFill>
+                <a:schemeClr val="dk1"/>
+              </a:solidFill>
+              <a:latin typeface="Arial"/>
+              <a:ea typeface="Arial"/>
+              <a:cs typeface="Arial"/>
+              <a:sym typeface="Arial"/>
+            </a:endParaRPr>
+          </a:p>
+          <a:p>
+            <a:pPr marL="0" marR="0" lvl="0" indent="0" algn="r" rtl="0">
+              <a:lnSpc>
+                <a:spcPct val="120000"/>
+              </a:lnSpc>
+              <a:spcBef>
+                <a:spcPts val="0"/>
+              </a:spcBef>
+              <a:spcAft>
+                <a:spcPts val="0"/>
+              </a:spcAft>
+              <a:buNone/>
+            </a:pPr>
+            <a:r>
+              <a:rPr lang="it-IT" sz="1800" b="1" i="0" u="none" strike="noStrike" cap="none" dirty="0">
+                <a:solidFill>
+                  <a:srgbClr val="FFFFFF"/>
+                </a:solidFill>
+                <a:latin typeface="Arial"/>
+                <a:ea typeface="Arial"/>
+                <a:cs typeface="Arial"/>
+                <a:sym typeface="Arial"/>
+              </a:rPr>
+              <a:t>Francesco Maria Torino</a:t>
+            </a:r>
+            <a:endParaRPr dirty="0"/>
+          </a:p>
+          <a:p>
+            <a:pPr marL="0" marR="0" lvl="0" indent="0" algn="r" rtl="0">
+              <a:lnSpc>
+                <a:spcPct val="120000"/>
+              </a:lnSpc>
+              <a:spcBef>
+                <a:spcPts val="0"/>
+              </a:spcBef>
+              <a:spcAft>
+                <a:spcPts val="0"/>
+              </a:spcAft>
+              <a:buNone/>
+            </a:pPr>
+            <a:r>
+              <a:rPr lang="it-IT" sz="1800" b="1" i="0" u="none" strike="noStrike" cap="none" dirty="0">
+                <a:solidFill>
+                  <a:srgbClr val="FFFFFF"/>
+                </a:solidFill>
+                <a:latin typeface="Arial"/>
+                <a:ea typeface="Arial"/>
+                <a:cs typeface="Arial"/>
+                <a:sym typeface="Arial"/>
+              </a:rPr>
+              <a:t>Progetto  </a:t>
+            </a:r>
+            <a:r>
+              <a:rPr lang="it-IT" sz="1800" b="1" i="0" u="none" strike="noStrike" cap="none" dirty="0" err="1">
+                <a:solidFill>
+                  <a:srgbClr val="FFFFFF"/>
+                </a:solidFill>
+                <a:latin typeface="Arial"/>
+                <a:ea typeface="Arial"/>
+                <a:cs typeface="Arial"/>
+                <a:sym typeface="Arial"/>
+              </a:rPr>
+              <a:t>SwD</a:t>
+            </a:r>
+            <a:endParaRPr sz="1800" b="0" i="0" u="none" strike="noStrike" cap="none" dirty="0">
+              <a:solidFill>
+                <a:schemeClr val="dk1"/>
+              </a:solidFill>
+              <a:latin typeface="Arial"/>
+              <a:ea typeface="Arial"/>
+              <a:cs typeface="Arial"/>
+              <a:sym typeface="Arial"/>
+            </a:endParaRPr>
+          </a:p>
+        </p:txBody>
+      </p:sp>
+      <p:sp>
+        <p:nvSpPr>
+          <p:cNvPr id="5" name="Google Shape;116;p2">
+            <a:extLst>
+              <a:ext uri="{FF2B5EF4-FFF2-40B4-BE49-F238E27FC236}">
+                <a16:creationId xmlns:a16="http://schemas.microsoft.com/office/drawing/2014/main" id="{C7AF3CBE-0910-ECE3-3591-BEF90381128E}"/>
+              </a:ext>
+            </a:extLst>
+          </p:cNvPr>
+          <p:cNvSpPr txBox="1"/>
+          <p:nvPr/>
+        </p:nvSpPr>
+        <p:spPr>
+          <a:xfrm>
+            <a:off x="983149" y="8841066"/>
+            <a:ext cx="3165600" cy="434991"/>
+          </a:xfrm>
+          <a:prstGeom prst="rect">
+            <a:avLst/>
+          </a:prstGeom>
+          <a:noFill/>
+          <a:ln>
+            <a:noFill/>
+          </a:ln>
+        </p:spPr>
+        <p:txBody>
+          <a:bodyPr spcFirstLastPara="1" wrap="square" lIns="50800" tIns="50800" rIns="50800" bIns="50800" anchor="ctr" anchorCtr="0">
+            <a:spAutoFit/>
+          </a:bodyPr>
+          <a:lstStyle/>
+          <a:p>
+            <a:pPr marL="0" marR="0" lvl="0" indent="0" algn="l" rtl="0">
+              <a:lnSpc>
+                <a:spcPct val="120000"/>
+              </a:lnSpc>
+              <a:spcBef>
+                <a:spcPts val="0"/>
+              </a:spcBef>
+              <a:spcAft>
+                <a:spcPts val="0"/>
+              </a:spcAft>
+              <a:buNone/>
+            </a:pPr>
+            <a:r>
+              <a:rPr lang="it-IT" sz="1800" b="1" i="0" u="sng" strike="noStrike" cap="none">
+                <a:solidFill>
+                  <a:srgbClr val="FFFFFF"/>
+                </a:solidFill>
+                <a:latin typeface="Play"/>
+                <a:ea typeface="Play"/>
+                <a:cs typeface="Play"/>
+                <a:sym typeface="Play"/>
+                <a:hlinkClick r:id="rId4">
+                  <a:extLst>
+                    <a:ext uri="{A12FA001-AC4F-418D-AE19-62706E023703}">
+                      <ahyp:hlinkClr xmlns:ahyp="http://schemas.microsoft.com/office/drawing/2018/hyperlinkcolor" val="tx"/>
+                    </a:ext>
+                  </a:extLst>
+                </a:hlinkClick>
+              </a:rPr>
+              <a:t>f.torino1@studenti.unisa.it</a:t>
+            </a:r>
+            <a:endParaRPr sz="1800" b="0" i="0" u="sng" strike="noStrike" cap="none">
+              <a:solidFill>
+                <a:schemeClr val="dk1"/>
+              </a:solidFill>
+              <a:latin typeface="Arial"/>
+              <a:ea typeface="Arial"/>
+              <a:cs typeface="Arial"/>
+              <a:sym typeface="Arial"/>
+              <a:hlinkClick r:id="rId4">
+                <a:extLst>
+                  <a:ext uri="{A12FA001-AC4F-418D-AE19-62706E023703}">
+                    <ahyp:hlinkClr xmlns:ahyp="http://schemas.microsoft.com/office/drawing/2018/hyperlinkcolor" val="tx"/>
+                  </a:ext>
+                </a:extLst>
+              </a:hlinkClick>
+            </a:endParaRPr>
+          </a:p>
+        </p:txBody>
+      </p:sp>
+      <p:pic>
+        <p:nvPicPr>
+          <p:cNvPr id="6" name="Google Shape;117;p2" descr="email.png">
+            <a:extLst>
+              <a:ext uri="{FF2B5EF4-FFF2-40B4-BE49-F238E27FC236}">
+                <a16:creationId xmlns:a16="http://schemas.microsoft.com/office/drawing/2014/main" id="{3EE255ED-3966-1463-0679-BE2C017261D0}"/>
+              </a:ext>
+            </a:extLst>
+          </p:cNvPr>
+          <p:cNvPicPr preferRelativeResize="0"/>
+          <p:nvPr/>
+        </p:nvPicPr>
+        <p:blipFill rotWithShape="1">
+          <a:blip r:embed="rId5">
+            <a:alphaModFix/>
+          </a:blip>
+          <a:srcRect/>
+          <a:stretch/>
+        </p:blipFill>
+        <p:spPr>
+          <a:xfrm>
+            <a:off x="641852" y="8953636"/>
+            <a:ext cx="254001" cy="254001"/>
+          </a:xfrm>
+          <a:prstGeom prst="rect">
+            <a:avLst/>
+          </a:prstGeom>
+          <a:noFill/>
+          <a:ln>
+            <a:noFill/>
+          </a:ln>
+        </p:spPr>
+      </p:pic>
+      <p:pic>
+        <p:nvPicPr>
+          <p:cNvPr id="12" name="Immagine 11" descr="Immagine che contiene testo, schermata, Carattere, logo&#10;&#10;Il contenuto generato dall'IA potrebbe non essere corretto.">
+            <a:extLst>
+              <a:ext uri="{FF2B5EF4-FFF2-40B4-BE49-F238E27FC236}">
+                <a16:creationId xmlns:a16="http://schemas.microsoft.com/office/drawing/2014/main" id="{C7BC24C2-5953-F055-802A-749D4646765B}"/>
+              </a:ext>
+            </a:extLst>
+          </p:cNvPr>
+          <p:cNvPicPr>
+            <a:picLocks noChangeAspect="1"/>
+          </p:cNvPicPr>
+          <p:nvPr/>
+        </p:nvPicPr>
+        <p:blipFill>
+          <a:blip r:embed="rId6"/>
+          <a:stretch>
+            <a:fillRect/>
+          </a:stretch>
+        </p:blipFill>
+        <p:spPr>
+          <a:xfrm>
+            <a:off x="9108788" y="2954014"/>
+            <a:ext cx="3351361" cy="3845571"/>
+          </a:xfrm>
+          <a:prstGeom prst="rect">
+            <a:avLst/>
+          </a:prstGeom>
+        </p:spPr>
+      </p:pic>
+      <p:sp>
+        <p:nvSpPr>
+          <p:cNvPr id="8" name="Google Shape;138;p3">
+            <a:extLst>
+              <a:ext uri="{FF2B5EF4-FFF2-40B4-BE49-F238E27FC236}">
+                <a16:creationId xmlns:a16="http://schemas.microsoft.com/office/drawing/2014/main" id="{8F0AC158-8FA8-D40A-8AF8-A16E319504EE}"/>
+              </a:ext>
+            </a:extLst>
+          </p:cNvPr>
+          <p:cNvSpPr txBox="1"/>
+          <p:nvPr/>
+        </p:nvSpPr>
+        <p:spPr>
+          <a:xfrm>
+            <a:off x="544651" y="3361017"/>
+            <a:ext cx="8256449" cy="3046948"/>
+          </a:xfrm>
+          <a:prstGeom prst="rect">
+            <a:avLst/>
+          </a:prstGeom>
+          <a:noFill/>
+          <a:ln>
+            <a:noFill/>
+          </a:ln>
+        </p:spPr>
+        <p:txBody>
+          <a:bodyPr spcFirstLastPara="1" wrap="square" lIns="91425" tIns="45700" rIns="91425" bIns="45700" anchor="t" anchorCtr="0">
+            <a:spAutoFit/>
+          </a:bodyPr>
+          <a:lstStyle/>
+          <a:p>
+            <a:r>
+              <a:rPr lang="it-IT" sz="2400" b="1" dirty="0" err="1">
+                <a:solidFill>
+                  <a:srgbClr val="303030"/>
+                </a:solidFill>
+                <a:latin typeface="Helvetica Neue"/>
+                <a:ea typeface="Helvetica Neue"/>
+                <a:cs typeface="Helvetica Neue"/>
+              </a:rPr>
+              <a:t>Formal</a:t>
+            </a:r>
+            <a:r>
+              <a:rPr lang="it-IT" sz="2400" b="1" dirty="0">
+                <a:solidFill>
+                  <a:srgbClr val="303030"/>
+                </a:solidFill>
+                <a:latin typeface="Helvetica Neue"/>
+                <a:ea typeface="Helvetica Neue"/>
+                <a:cs typeface="Helvetica Neue"/>
+              </a:rPr>
+              <a:t> </a:t>
+            </a:r>
+            <a:r>
+              <a:rPr lang="it-IT" sz="2400" b="1" dirty="0" err="1">
+                <a:solidFill>
+                  <a:srgbClr val="303030"/>
+                </a:solidFill>
+                <a:latin typeface="Helvetica Neue"/>
+                <a:ea typeface="Helvetica Neue"/>
+                <a:cs typeface="Helvetica Neue"/>
+              </a:rPr>
+              <a:t>verification</a:t>
+            </a:r>
+            <a:r>
+              <a:rPr lang="it-IT" sz="2400" b="1" dirty="0">
+                <a:solidFill>
+                  <a:srgbClr val="303030"/>
+                </a:solidFill>
+                <a:latin typeface="Helvetica Neue"/>
+                <a:ea typeface="Helvetica Neue"/>
+                <a:cs typeface="Helvetica Neue"/>
+              </a:rPr>
+              <a:t> with </a:t>
+            </a:r>
+            <a:r>
+              <a:rPr lang="it-IT" sz="2400" b="1" dirty="0" err="1">
+                <a:solidFill>
+                  <a:srgbClr val="303030"/>
+                </a:solidFill>
+                <a:latin typeface="Helvetica Neue"/>
+                <a:ea typeface="Helvetica Neue"/>
+                <a:cs typeface="Helvetica Neue"/>
+              </a:rPr>
+              <a:t>OpenJML</a:t>
+            </a:r>
+            <a:r>
+              <a:rPr lang="it-IT" sz="2400" b="1" dirty="0">
+                <a:solidFill>
+                  <a:srgbClr val="303030"/>
+                </a:solidFill>
+                <a:latin typeface="Helvetica Neue"/>
+                <a:ea typeface="Helvetica Neue"/>
+                <a:cs typeface="Helvetica Neue"/>
+              </a:rPr>
+              <a:t> made </a:t>
+            </a:r>
+            <a:r>
+              <a:rPr lang="it-IT" sz="2400" b="1" dirty="0" err="1">
+                <a:solidFill>
+                  <a:srgbClr val="303030"/>
+                </a:solidFill>
+                <a:latin typeface="Helvetica Neue"/>
+                <a:ea typeface="Helvetica Neue"/>
+                <a:cs typeface="Helvetica Neue"/>
+              </a:rPr>
+              <a:t>it</a:t>
+            </a:r>
+            <a:r>
+              <a:rPr lang="it-IT" sz="2400" b="1" dirty="0">
+                <a:solidFill>
+                  <a:srgbClr val="303030"/>
+                </a:solidFill>
+                <a:latin typeface="Helvetica Neue"/>
+                <a:ea typeface="Helvetica Neue"/>
+                <a:cs typeface="Helvetica Neue"/>
+              </a:rPr>
+              <a:t> </a:t>
+            </a:r>
+            <a:r>
+              <a:rPr lang="it-IT" sz="2400" b="1" dirty="0" err="1">
+                <a:solidFill>
+                  <a:srgbClr val="303030"/>
+                </a:solidFill>
+                <a:latin typeface="Helvetica Neue"/>
+                <a:ea typeface="Helvetica Neue"/>
+                <a:cs typeface="Helvetica Neue"/>
+              </a:rPr>
+              <a:t>possible</a:t>
+            </a:r>
+            <a:r>
+              <a:rPr lang="it-IT" sz="2400" b="1" dirty="0">
+                <a:solidFill>
+                  <a:srgbClr val="303030"/>
+                </a:solidFill>
+                <a:latin typeface="Helvetica Neue"/>
+                <a:ea typeface="Helvetica Neue"/>
+                <a:cs typeface="Helvetica Neue"/>
+              </a:rPr>
+              <a:t> to </a:t>
+            </a:r>
+            <a:r>
+              <a:rPr lang="it-IT" sz="2400" b="1" dirty="0" err="1">
+                <a:solidFill>
+                  <a:srgbClr val="303030"/>
+                </a:solidFill>
+                <a:latin typeface="Helvetica Neue"/>
+                <a:ea typeface="Helvetica Neue"/>
+                <a:cs typeface="Helvetica Neue"/>
+              </a:rPr>
+              <a:t>mathematically</a:t>
+            </a:r>
+            <a:r>
+              <a:rPr lang="it-IT" sz="2400" b="1" dirty="0">
+                <a:solidFill>
+                  <a:srgbClr val="303030"/>
+                </a:solidFill>
+                <a:latin typeface="Helvetica Neue"/>
+                <a:ea typeface="Helvetica Neue"/>
+                <a:cs typeface="Helvetica Neue"/>
+              </a:rPr>
+              <a:t> </a:t>
+            </a:r>
+            <a:r>
+              <a:rPr lang="it-IT" sz="2400" b="1" dirty="0" err="1">
+                <a:solidFill>
+                  <a:srgbClr val="303030"/>
+                </a:solidFill>
+                <a:latin typeface="Helvetica Neue"/>
+                <a:ea typeface="Helvetica Neue"/>
+                <a:cs typeface="Helvetica Neue"/>
+              </a:rPr>
+              <a:t>guarantee</a:t>
+            </a:r>
+            <a:r>
+              <a:rPr lang="it-IT" sz="2400" b="1" dirty="0">
+                <a:solidFill>
+                  <a:srgbClr val="303030"/>
+                </a:solidFill>
+                <a:latin typeface="Helvetica Neue"/>
+                <a:ea typeface="Helvetica Neue"/>
+                <a:cs typeface="Helvetica Neue"/>
+              </a:rPr>
+              <a:t> </a:t>
+            </a:r>
+            <a:r>
+              <a:rPr lang="it-IT" sz="2400" b="1" dirty="0" err="1">
+                <a:solidFill>
+                  <a:srgbClr val="303030"/>
+                </a:solidFill>
+                <a:latin typeface="Helvetica Neue"/>
+                <a:ea typeface="Helvetica Neue"/>
+                <a:cs typeface="Helvetica Neue"/>
+              </a:rPr>
+              <a:t>that</a:t>
+            </a:r>
+            <a:r>
+              <a:rPr lang="it-IT" sz="2400" b="1" dirty="0">
+                <a:solidFill>
+                  <a:srgbClr val="303030"/>
+                </a:solidFill>
+                <a:latin typeface="Helvetica Neue"/>
+                <a:ea typeface="Helvetica Neue"/>
+                <a:cs typeface="Helvetica Neue"/>
+              </a:rPr>
+              <a:t> the </a:t>
+            </a:r>
+            <a:r>
+              <a:rPr lang="it-IT" sz="2400" b="1" dirty="0" err="1">
+                <a:solidFill>
+                  <a:srgbClr val="303030"/>
+                </a:solidFill>
+                <a:latin typeface="Helvetica Neue"/>
+                <a:ea typeface="Helvetica Neue"/>
+                <a:cs typeface="Helvetica Neue"/>
+              </a:rPr>
+              <a:t>GeneticEngine</a:t>
+            </a:r>
+            <a:r>
+              <a:rPr lang="it-IT" sz="2400" b="1" dirty="0">
+                <a:solidFill>
+                  <a:srgbClr val="303030"/>
+                </a:solidFill>
+                <a:latin typeface="Helvetica Neue"/>
+                <a:ea typeface="Helvetica Neue"/>
+                <a:cs typeface="Helvetica Neue"/>
+              </a:rPr>
+              <a:t> </a:t>
+            </a:r>
+            <a:r>
+              <a:rPr lang="it-IT" sz="2400" b="1" dirty="0" err="1">
+                <a:solidFill>
+                  <a:srgbClr val="303030"/>
+                </a:solidFill>
+                <a:latin typeface="Helvetica Neue"/>
+                <a:ea typeface="Helvetica Neue"/>
+                <a:cs typeface="Helvetica Neue"/>
+              </a:rPr>
+              <a:t>behaves</a:t>
+            </a:r>
+            <a:r>
+              <a:rPr lang="it-IT" sz="2400" b="1" dirty="0">
+                <a:solidFill>
+                  <a:srgbClr val="303030"/>
+                </a:solidFill>
+                <a:latin typeface="Helvetica Neue"/>
+                <a:ea typeface="Helvetica Neue"/>
+                <a:cs typeface="Helvetica Neue"/>
+              </a:rPr>
+              <a:t> </a:t>
+            </a:r>
+            <a:r>
+              <a:rPr lang="it-IT" sz="2400" b="1" dirty="0" err="1">
+                <a:solidFill>
+                  <a:srgbClr val="303030"/>
+                </a:solidFill>
+                <a:latin typeface="Helvetica Neue"/>
+                <a:ea typeface="Helvetica Neue"/>
+                <a:cs typeface="Helvetica Neue"/>
+              </a:rPr>
+              <a:t>correctly</a:t>
+            </a:r>
+            <a:r>
+              <a:rPr lang="it-IT" sz="2400" b="1" dirty="0">
+                <a:solidFill>
+                  <a:srgbClr val="303030"/>
+                </a:solidFill>
+                <a:latin typeface="Helvetica Neue"/>
+                <a:ea typeface="Helvetica Neue"/>
+                <a:cs typeface="Helvetica Neue"/>
+              </a:rPr>
+              <a:t> </a:t>
+            </a:r>
+            <a:r>
+              <a:rPr lang="it-IT" sz="2400" b="1" dirty="0" err="1">
+                <a:solidFill>
+                  <a:srgbClr val="303030"/>
+                </a:solidFill>
+                <a:latin typeface="Helvetica Neue"/>
+                <a:ea typeface="Helvetica Neue"/>
+                <a:cs typeface="Helvetica Neue"/>
+              </a:rPr>
+              <a:t>at</a:t>
+            </a:r>
+            <a:r>
+              <a:rPr lang="it-IT" sz="2400" b="1" dirty="0">
+                <a:solidFill>
+                  <a:srgbClr val="303030"/>
+                </a:solidFill>
+                <a:latin typeface="Helvetica Neue"/>
+                <a:ea typeface="Helvetica Neue"/>
+                <a:cs typeface="Helvetica Neue"/>
+              </a:rPr>
+              <a:t> </a:t>
+            </a:r>
+            <a:r>
+              <a:rPr lang="it-IT" sz="2400" b="1" dirty="0" err="1">
+                <a:solidFill>
+                  <a:srgbClr val="303030"/>
+                </a:solidFill>
+                <a:latin typeface="Helvetica Neue"/>
+                <a:ea typeface="Helvetica Neue"/>
+                <a:cs typeface="Helvetica Neue"/>
+              </a:rPr>
+              <a:t>all</a:t>
+            </a:r>
+            <a:r>
+              <a:rPr lang="it-IT" sz="2400" b="1" dirty="0">
+                <a:solidFill>
+                  <a:srgbClr val="303030"/>
+                </a:solidFill>
+                <a:latin typeface="Helvetica Neue"/>
+                <a:ea typeface="Helvetica Neue"/>
+                <a:cs typeface="Helvetica Neue"/>
+              </a:rPr>
+              <a:t> times, </a:t>
+            </a:r>
+            <a:r>
+              <a:rPr lang="it-IT" sz="2400" b="1" dirty="0" err="1">
+                <a:solidFill>
+                  <a:srgbClr val="303030"/>
+                </a:solidFill>
+                <a:latin typeface="Helvetica Neue"/>
+                <a:ea typeface="Helvetica Neue"/>
+                <a:cs typeface="Helvetica Neue"/>
+              </a:rPr>
+              <a:t>preventing</a:t>
+            </a:r>
+            <a:r>
+              <a:rPr lang="it-IT" sz="2400" b="1" dirty="0">
+                <a:solidFill>
+                  <a:srgbClr val="303030"/>
+                </a:solidFill>
+                <a:latin typeface="Helvetica Neue"/>
+                <a:ea typeface="Helvetica Neue"/>
+                <a:cs typeface="Helvetica Neue"/>
+              </a:rPr>
+              <a:t> </a:t>
+            </a:r>
+            <a:r>
+              <a:rPr lang="it-IT" sz="2400" b="1" dirty="0" err="1">
+                <a:solidFill>
+                  <a:srgbClr val="303030"/>
+                </a:solidFill>
+                <a:latin typeface="Helvetica Neue"/>
+                <a:ea typeface="Helvetica Neue"/>
+                <a:cs typeface="Helvetica Neue"/>
+              </a:rPr>
+              <a:t>silent</a:t>
+            </a:r>
+            <a:r>
+              <a:rPr lang="it-IT" sz="2400" b="1" dirty="0">
+                <a:solidFill>
+                  <a:srgbClr val="303030"/>
+                </a:solidFill>
+                <a:latin typeface="Helvetica Neue"/>
+                <a:ea typeface="Helvetica Neue"/>
+                <a:cs typeface="Helvetica Neue"/>
+              </a:rPr>
+              <a:t> </a:t>
+            </a:r>
+            <a:r>
+              <a:rPr lang="it-IT" sz="2400" b="1" dirty="0" err="1">
+                <a:solidFill>
+                  <a:srgbClr val="303030"/>
+                </a:solidFill>
+                <a:latin typeface="Helvetica Neue"/>
+                <a:ea typeface="Helvetica Neue"/>
+                <a:cs typeface="Helvetica Neue"/>
+              </a:rPr>
+              <a:t>logical</a:t>
+            </a:r>
+            <a:r>
+              <a:rPr lang="it-IT" sz="2400" b="1" dirty="0">
+                <a:solidFill>
+                  <a:srgbClr val="303030"/>
+                </a:solidFill>
+                <a:latin typeface="Helvetica Neue"/>
+                <a:ea typeface="Helvetica Neue"/>
+                <a:cs typeface="Helvetica Neue"/>
+              </a:rPr>
+              <a:t> </a:t>
+            </a:r>
+            <a:r>
+              <a:rPr lang="it-IT" sz="2400" b="1" dirty="0" err="1">
+                <a:solidFill>
+                  <a:srgbClr val="303030"/>
+                </a:solidFill>
+                <a:latin typeface="Helvetica Neue"/>
+                <a:ea typeface="Helvetica Neue"/>
+                <a:cs typeface="Helvetica Neue"/>
+              </a:rPr>
+              <a:t>errors</a:t>
+            </a:r>
+            <a:r>
+              <a:rPr lang="it-IT" sz="2400" b="1" dirty="0">
+                <a:solidFill>
+                  <a:srgbClr val="303030"/>
+                </a:solidFill>
+                <a:latin typeface="Helvetica Neue"/>
+                <a:ea typeface="Helvetica Neue"/>
+                <a:cs typeface="Helvetica Neue"/>
+              </a:rPr>
+              <a:t> in the </a:t>
+            </a:r>
+            <a:r>
+              <a:rPr lang="it-IT" sz="2400" b="1" dirty="0" err="1">
+                <a:solidFill>
+                  <a:srgbClr val="303030"/>
+                </a:solidFill>
+                <a:latin typeface="Helvetica Neue"/>
+                <a:ea typeface="Helvetica Neue"/>
+                <a:cs typeface="Helvetica Neue"/>
+              </a:rPr>
+              <a:t>most</a:t>
+            </a:r>
+            <a:r>
+              <a:rPr lang="it-IT" sz="2400" b="1" dirty="0">
+                <a:solidFill>
+                  <a:srgbClr val="303030"/>
+                </a:solidFill>
+                <a:latin typeface="Helvetica Neue"/>
+                <a:ea typeface="Helvetica Neue"/>
+                <a:cs typeface="Helvetica Neue"/>
+              </a:rPr>
+              <a:t> </a:t>
+            </a:r>
+            <a:r>
+              <a:rPr lang="it-IT" sz="2400" b="1" dirty="0" err="1">
+                <a:solidFill>
+                  <a:srgbClr val="303030"/>
+                </a:solidFill>
+                <a:latin typeface="Helvetica Neue"/>
+                <a:ea typeface="Helvetica Neue"/>
+                <a:cs typeface="Helvetica Neue"/>
+              </a:rPr>
+              <a:t>critical</a:t>
+            </a:r>
+            <a:r>
+              <a:rPr lang="it-IT" sz="2400" b="1" dirty="0">
+                <a:solidFill>
+                  <a:srgbClr val="303030"/>
+                </a:solidFill>
+                <a:latin typeface="Helvetica Neue"/>
+                <a:ea typeface="Helvetica Neue"/>
+                <a:cs typeface="Helvetica Neue"/>
+              </a:rPr>
+              <a:t> parts of the </a:t>
+            </a:r>
+            <a:r>
+              <a:rPr lang="it-IT" sz="2400" b="1" dirty="0" err="1">
+                <a:solidFill>
+                  <a:srgbClr val="303030"/>
+                </a:solidFill>
+                <a:latin typeface="Helvetica Neue"/>
+                <a:ea typeface="Helvetica Neue"/>
+                <a:cs typeface="Helvetica Neue"/>
+              </a:rPr>
+              <a:t>algorithm</a:t>
+            </a:r>
+            <a:r>
+              <a:rPr lang="it-IT" sz="2400" b="1" dirty="0">
+                <a:solidFill>
+                  <a:srgbClr val="303030"/>
+                </a:solidFill>
+                <a:latin typeface="Helvetica Neue"/>
+                <a:ea typeface="Helvetica Neue"/>
+                <a:cs typeface="Helvetica Neue"/>
+              </a:rPr>
+              <a:t> (</a:t>
+            </a:r>
+            <a:r>
+              <a:rPr lang="it-IT" sz="2400" b="1" dirty="0" err="1">
+                <a:solidFill>
+                  <a:srgbClr val="303030"/>
+                </a:solidFill>
+                <a:latin typeface="Helvetica Neue"/>
+                <a:ea typeface="Helvetica Neue"/>
+                <a:cs typeface="Helvetica Neue"/>
+              </a:rPr>
+              <a:t>mutation</a:t>
+            </a:r>
+            <a:r>
+              <a:rPr lang="it-IT" sz="2400" b="1" dirty="0">
+                <a:solidFill>
+                  <a:srgbClr val="303030"/>
+                </a:solidFill>
+                <a:latin typeface="Helvetica Neue"/>
+                <a:ea typeface="Helvetica Neue"/>
+                <a:cs typeface="Helvetica Neue"/>
+              </a:rPr>
+              <a:t>, crossover, fitness).</a:t>
+            </a:r>
+          </a:p>
+          <a:p>
+            <a:r>
+              <a:rPr lang="it-IT" sz="2400" b="1" dirty="0">
+                <a:solidFill>
+                  <a:srgbClr val="303030"/>
+                </a:solidFill>
+                <a:latin typeface="Helvetica Neue"/>
+                <a:ea typeface="Helvetica Neue"/>
+                <a:cs typeface="Helvetica Neue"/>
+              </a:rPr>
+              <a:t>ESC and RAC </a:t>
+            </a:r>
+            <a:r>
+              <a:rPr lang="it-IT" sz="2400" b="1" dirty="0" err="1">
+                <a:solidFill>
+                  <a:srgbClr val="303030"/>
+                </a:solidFill>
+                <a:latin typeface="Helvetica Neue"/>
+                <a:ea typeface="Helvetica Neue"/>
+                <a:cs typeface="Helvetica Neue"/>
+              </a:rPr>
+              <a:t>verified</a:t>
+            </a:r>
+            <a:r>
+              <a:rPr lang="it-IT" sz="2400" b="1" dirty="0">
+                <a:solidFill>
+                  <a:srgbClr val="303030"/>
+                </a:solidFill>
+                <a:latin typeface="Helvetica Neue"/>
+                <a:ea typeface="Helvetica Neue"/>
+                <a:cs typeface="Helvetica Neue"/>
+              </a:rPr>
+              <a:t> </a:t>
+            </a:r>
+            <a:r>
+              <a:rPr lang="it-IT" sz="2400" b="1" dirty="0" err="1">
+                <a:solidFill>
+                  <a:srgbClr val="303030"/>
+                </a:solidFill>
+                <a:latin typeface="Helvetica Neue"/>
+                <a:ea typeface="Helvetica Neue"/>
+                <a:cs typeface="Helvetica Neue"/>
+              </a:rPr>
+              <a:t>that</a:t>
+            </a:r>
+            <a:r>
+              <a:rPr lang="it-IT" sz="2400" b="1" dirty="0">
+                <a:solidFill>
+                  <a:srgbClr val="303030"/>
+                </a:solidFill>
+                <a:latin typeface="Helvetica Neue"/>
+                <a:ea typeface="Helvetica Neue"/>
+                <a:cs typeface="Helvetica Neue"/>
+              </a:rPr>
+              <a:t> </a:t>
+            </a:r>
+            <a:r>
+              <a:rPr lang="it-IT" sz="2400" b="1" dirty="0" err="1">
+                <a:solidFill>
+                  <a:srgbClr val="303030"/>
+                </a:solidFill>
+                <a:latin typeface="Helvetica Neue"/>
+                <a:ea typeface="Helvetica Neue"/>
+                <a:cs typeface="Helvetica Neue"/>
+              </a:rPr>
+              <a:t>all</a:t>
+            </a:r>
+            <a:r>
+              <a:rPr lang="it-IT" sz="2400" b="1" dirty="0">
+                <a:solidFill>
+                  <a:srgbClr val="303030"/>
+                </a:solidFill>
+                <a:latin typeface="Helvetica Neue"/>
+                <a:ea typeface="Helvetica Neue"/>
+                <a:cs typeface="Helvetica Neue"/>
+              </a:rPr>
+              <a:t> </a:t>
+            </a:r>
+            <a:r>
+              <a:rPr lang="it-IT" sz="2400" b="1" dirty="0" err="1">
+                <a:solidFill>
+                  <a:srgbClr val="303030"/>
+                </a:solidFill>
+                <a:latin typeface="Helvetica Neue"/>
+                <a:ea typeface="Helvetica Neue"/>
+                <a:cs typeface="Helvetica Neue"/>
+              </a:rPr>
+              <a:t>preconditions</a:t>
+            </a:r>
+            <a:r>
+              <a:rPr lang="it-IT" sz="2400" b="1" dirty="0">
+                <a:solidFill>
+                  <a:srgbClr val="303030"/>
+                </a:solidFill>
+                <a:latin typeface="Helvetica Neue"/>
+                <a:ea typeface="Helvetica Neue"/>
+                <a:cs typeface="Helvetica Neue"/>
+              </a:rPr>
+              <a:t>, </a:t>
+            </a:r>
+            <a:r>
+              <a:rPr lang="it-IT" sz="2400" b="1" dirty="0" err="1">
+                <a:solidFill>
+                  <a:srgbClr val="303030"/>
+                </a:solidFill>
+                <a:latin typeface="Helvetica Neue"/>
+                <a:ea typeface="Helvetica Neue"/>
+                <a:cs typeface="Helvetica Neue"/>
+              </a:rPr>
+              <a:t>postconditions</a:t>
+            </a:r>
+            <a:r>
+              <a:rPr lang="it-IT" sz="2400" b="1" dirty="0">
+                <a:solidFill>
+                  <a:srgbClr val="303030"/>
+                </a:solidFill>
+                <a:latin typeface="Helvetica Neue"/>
+                <a:ea typeface="Helvetica Neue"/>
+                <a:cs typeface="Helvetica Neue"/>
+              </a:rPr>
+              <a:t>, and </a:t>
+            </a:r>
+            <a:r>
+              <a:rPr lang="it-IT" sz="2400" b="1" dirty="0" err="1">
+                <a:solidFill>
+                  <a:srgbClr val="303030"/>
+                </a:solidFill>
+                <a:latin typeface="Helvetica Neue"/>
+                <a:ea typeface="Helvetica Neue"/>
+                <a:cs typeface="Helvetica Neue"/>
+              </a:rPr>
+              <a:t>invariants</a:t>
+            </a:r>
+            <a:r>
+              <a:rPr lang="it-IT" sz="2400" b="1" dirty="0">
+                <a:solidFill>
+                  <a:srgbClr val="303030"/>
+                </a:solidFill>
+                <a:latin typeface="Helvetica Neue"/>
+                <a:ea typeface="Helvetica Neue"/>
+                <a:cs typeface="Helvetica Neue"/>
+              </a:rPr>
+              <a:t> </a:t>
+            </a:r>
+            <a:r>
+              <a:rPr lang="it-IT" sz="2400" b="1" dirty="0" err="1">
+                <a:solidFill>
+                  <a:srgbClr val="303030"/>
+                </a:solidFill>
+                <a:latin typeface="Helvetica Neue"/>
+                <a:ea typeface="Helvetica Neue"/>
+                <a:cs typeface="Helvetica Neue"/>
+              </a:rPr>
+              <a:t>were</a:t>
+            </a:r>
+            <a:r>
+              <a:rPr lang="it-IT" sz="2400" b="1" dirty="0">
+                <a:solidFill>
+                  <a:srgbClr val="303030"/>
+                </a:solidFill>
+                <a:latin typeface="Helvetica Neue"/>
+                <a:ea typeface="Helvetica Neue"/>
+                <a:cs typeface="Helvetica Neue"/>
+              </a:rPr>
+              <a:t> </a:t>
+            </a:r>
+            <a:r>
+              <a:rPr lang="it-IT" sz="2400" b="1" dirty="0" err="1">
+                <a:solidFill>
+                  <a:srgbClr val="303030"/>
+                </a:solidFill>
+                <a:latin typeface="Helvetica Neue"/>
+                <a:ea typeface="Helvetica Neue"/>
+                <a:cs typeface="Helvetica Neue"/>
+              </a:rPr>
+              <a:t>satisfied</a:t>
+            </a:r>
+            <a:r>
+              <a:rPr lang="it-IT" sz="2400" b="1" dirty="0">
+                <a:solidFill>
+                  <a:srgbClr val="303030"/>
+                </a:solidFill>
+                <a:latin typeface="Helvetica Neue"/>
+                <a:ea typeface="Helvetica Neue"/>
+                <a:cs typeface="Helvetica Neue"/>
+              </a:rPr>
+              <a:t>, </a:t>
+            </a:r>
+            <a:r>
+              <a:rPr lang="it-IT" sz="2400" b="1" dirty="0" err="1">
+                <a:solidFill>
+                  <a:srgbClr val="303030"/>
+                </a:solidFill>
+                <a:latin typeface="Helvetica Neue"/>
+                <a:ea typeface="Helvetica Neue"/>
+                <a:cs typeface="Helvetica Neue"/>
+              </a:rPr>
+              <a:t>increasing</a:t>
+            </a:r>
+            <a:r>
+              <a:rPr lang="it-IT" sz="2400" b="1" dirty="0">
+                <a:solidFill>
+                  <a:srgbClr val="303030"/>
+                </a:solidFill>
+                <a:latin typeface="Helvetica Neue"/>
+                <a:ea typeface="Helvetica Neue"/>
+                <a:cs typeface="Helvetica Neue"/>
+              </a:rPr>
+              <a:t> the overall reliability of the PEGI </a:t>
+            </a:r>
+            <a:r>
+              <a:rPr lang="it-IT" sz="2400" b="1" dirty="0" err="1">
+                <a:solidFill>
+                  <a:srgbClr val="303030"/>
+                </a:solidFill>
+                <a:latin typeface="Helvetica Neue"/>
+                <a:ea typeface="Helvetica Neue"/>
+                <a:cs typeface="Helvetica Neue"/>
+              </a:rPr>
+              <a:t>classifier</a:t>
+            </a:r>
+            <a:r>
+              <a:rPr lang="it-IT" sz="2400" b="1" dirty="0">
+                <a:solidFill>
+                  <a:srgbClr val="303030"/>
+                </a:solidFill>
+                <a:latin typeface="Helvetica Neue"/>
+                <a:ea typeface="Helvetica Neue"/>
+                <a:cs typeface="Helvetica Neue"/>
+              </a:rPr>
+              <a:t>.</a:t>
+            </a:r>
+            <a:endParaRPr dirty="0"/>
+          </a:p>
+        </p:txBody>
+      </p:sp>
+    </p:spTree>
+    <p:extLst>
+      <p:ext uri="{BB962C8B-B14F-4D97-AF65-F5344CB8AC3E}">
+        <p14:creationId xmlns:p14="http://schemas.microsoft.com/office/powerpoint/2010/main" val="1831289823"/>
+      </p:ext>
+    </p:extLst>
+  </p:cSld>
+  <p:clrMapOvr>
+    <a:masterClrMapping/>
+  </p:clrMapOvr>
+  <mc:AlternateContent xmlns:mc="http://schemas.openxmlformats.org/markup-compatibility/2006" xmlns:p159="http://schemas.microsoft.com/office/powerpoint/2015/09/main">
+    <mc:Choice Requires="p159">
+      <p:transition xmlns:p14="http://schemas.microsoft.com/office/powerpoint/2010/main" spd="slow" p14:dur="2000">
+        <p159:morph option="byObject"/>
+      </p:transition>
+    </mc:Choice>
+    <mc:Fallback xmlns="">
+      <p:transition spd="slow">
+        <p:fade/>
+      </p:transition>
+    </mc:Fallback>
+  </mc:AlternateContent>
+</p:sld>
+</file>
+
+<file path=ppt/slides/slide6.xml><?xml version="1.0" encoding="utf-8"?>
+<p:sld xmlns:a="http://schemas.openxmlformats.org/drawingml/2006/main" xmlns:r="http://schemas.openxmlformats.org/officeDocument/2006/relationships" xmlns:p="http://schemas.openxmlformats.org/presentationml/2006/main">
+  <p:cSld>
+    <p:spTree>
+      <p:nvGrpSpPr>
+        <p:cNvPr id="1" name="Shape 128">
+          <a:extLst>
+            <a:ext uri="{FF2B5EF4-FFF2-40B4-BE49-F238E27FC236}">
+              <a16:creationId xmlns:a16="http://schemas.microsoft.com/office/drawing/2014/main" id="{2E47574A-3543-3CB6-A37C-4283B655A71D}"/>
+            </a:ext>
+          </a:extLst>
+        </p:cNvPr>
+        <p:cNvGrpSpPr/>
+        <p:nvPr/>
+      </p:nvGrpSpPr>
+      <p:grpSpPr>
+        <a:xfrm>
+          <a:off x="0" y="0"/>
+          <a:ext cx="0" cy="0"/>
+          <a:chOff x="0" y="0"/>
+          <a:chExt cx="0" cy="0"/>
+        </a:xfrm>
+      </p:grpSpPr>
+      <p:sp>
+        <p:nvSpPr>
+          <p:cNvPr id="130" name="Google Shape;130;p3">
+            <a:extLst>
+              <a:ext uri="{FF2B5EF4-FFF2-40B4-BE49-F238E27FC236}">
+                <a16:creationId xmlns:a16="http://schemas.microsoft.com/office/drawing/2014/main" id="{23C12B0A-AB9C-BE4E-1BAA-4EE8CDA40522}"/>
+              </a:ext>
+            </a:extLst>
+          </p:cNvPr>
+          <p:cNvSpPr/>
+          <p:nvPr/>
+        </p:nvSpPr>
+        <p:spPr>
+          <a:xfrm>
+            <a:off x="-6928" y="1890"/>
+            <a:ext cx="13018657" cy="1358090"/>
+          </a:xfrm>
+          <a:prstGeom prst="rect">
+            <a:avLst/>
+          </a:prstGeom>
+          <a:solidFill>
+            <a:srgbClr val="00A1FF"/>
+          </a:solidFill>
+          <a:ln>
+            <a:noFill/>
+          </a:ln>
+        </p:spPr>
+        <p:txBody>
+          <a:bodyPr spcFirstLastPara="1" wrap="square" lIns="50800" tIns="50800" rIns="50800" bIns="50800" anchor="ctr" anchorCtr="0">
+            <a:noAutofit/>
+          </a:bodyPr>
+          <a:lstStyle/>
+          <a:p>
+            <a:pPr marL="0" marR="0" lvl="0" indent="0" algn="ctr" rtl="0">
+              <a:lnSpc>
+                <a:spcPct val="100000"/>
+              </a:lnSpc>
+              <a:spcBef>
+                <a:spcPts val="0"/>
+              </a:spcBef>
+              <a:spcAft>
+                <a:spcPts val="0"/>
+              </a:spcAft>
+              <a:buNone/>
+            </a:pPr>
+            <a:endParaRPr sz="1800" b="0" i="0" u="none" strike="noStrike" cap="none">
+              <a:solidFill>
+                <a:schemeClr val="dk1"/>
+              </a:solidFill>
+              <a:latin typeface="Arial"/>
+              <a:ea typeface="Arial"/>
+              <a:cs typeface="Arial"/>
+              <a:sym typeface="Arial"/>
+            </a:endParaRPr>
+          </a:p>
+        </p:txBody>
+      </p:sp>
+      <p:sp>
+        <p:nvSpPr>
+          <p:cNvPr id="131" name="Google Shape;131;p3">
+            <a:extLst>
+              <a:ext uri="{FF2B5EF4-FFF2-40B4-BE49-F238E27FC236}">
+                <a16:creationId xmlns:a16="http://schemas.microsoft.com/office/drawing/2014/main" id="{36A2A2B4-0833-3445-E0FE-DC76ACB589E1}"/>
+              </a:ext>
+            </a:extLst>
+          </p:cNvPr>
+          <p:cNvSpPr txBox="1"/>
+          <p:nvPr/>
+        </p:nvSpPr>
+        <p:spPr>
+          <a:xfrm>
+            <a:off x="557064" y="397333"/>
+            <a:ext cx="11609060" cy="677301"/>
+          </a:xfrm>
+          <a:prstGeom prst="rect">
+            <a:avLst/>
+          </a:prstGeom>
+          <a:noFill/>
+          <a:ln>
+            <a:noFill/>
+          </a:ln>
+        </p:spPr>
+        <p:txBody>
+          <a:bodyPr spcFirstLastPara="1" wrap="square" lIns="50800" tIns="50800" rIns="50800" bIns="50800" anchor="b" anchorCtr="0">
+            <a:spAutoFit/>
+          </a:bodyPr>
+          <a:lstStyle/>
+          <a:p>
+            <a:pPr marL="0" marR="0" lvl="0" indent="0" algn="l" rtl="0">
+              <a:lnSpc>
+                <a:spcPct val="80000"/>
+              </a:lnSpc>
+              <a:spcBef>
+                <a:spcPts val="0"/>
+              </a:spcBef>
+              <a:spcAft>
+                <a:spcPts val="0"/>
+              </a:spcAft>
+              <a:buNone/>
+            </a:pPr>
+            <a:r>
+              <a:rPr lang="it-IT" sz="4500" b="1" i="0" u="none" strike="noStrike" cap="none" dirty="0">
+                <a:solidFill>
+                  <a:srgbClr val="FFFFFF"/>
+                </a:solidFill>
+                <a:latin typeface="Arial"/>
+                <a:ea typeface="Arial"/>
+                <a:cs typeface="Arial"/>
+                <a:sym typeface="Arial"/>
+              </a:rPr>
+              <a:t>Reliability</a:t>
+            </a:r>
+          </a:p>
+        </p:txBody>
+      </p:sp>
+      <p:pic>
+        <p:nvPicPr>
+          <p:cNvPr id="140" name="Google Shape;140;p3" descr="Immagine che contiene Elementi grafici, Blu elettrico, Carattere, logo&#10;&#10;Il contenuto generato dall'IA potrebbe non essere corretto.">
+            <a:extLst>
+              <a:ext uri="{FF2B5EF4-FFF2-40B4-BE49-F238E27FC236}">
+                <a16:creationId xmlns:a16="http://schemas.microsoft.com/office/drawing/2014/main" id="{B833F1C8-BBC0-277C-ACF5-A94BC4730A4F}"/>
+              </a:ext>
+            </a:extLst>
+          </p:cNvPr>
+          <p:cNvPicPr preferRelativeResize="0"/>
+          <p:nvPr/>
+        </p:nvPicPr>
+        <p:blipFill rotWithShape="1">
+          <a:blip r:embed="rId3">
+            <a:alphaModFix/>
+          </a:blip>
+          <a:srcRect/>
+          <a:stretch/>
+        </p:blipFill>
+        <p:spPr>
+          <a:xfrm>
+            <a:off x="11269071" y="102585"/>
+            <a:ext cx="1156713" cy="1156713"/>
+          </a:xfrm>
+          <a:prstGeom prst="rect">
+            <a:avLst/>
+          </a:prstGeom>
+          <a:noFill/>
+          <a:ln>
+            <a:noFill/>
+          </a:ln>
+        </p:spPr>
+      </p:pic>
+      <p:pic>
+        <p:nvPicPr>
+          <p:cNvPr id="141" name="Google Shape;141;p3" descr="Immagine che contiene Elementi grafici, Blu elettrico, Carattere, logo&#10;&#10;Il contenuto generato dall'IA potrebbe non essere corretto.">
+            <a:extLst>
+              <a:ext uri="{FF2B5EF4-FFF2-40B4-BE49-F238E27FC236}">
+                <a16:creationId xmlns:a16="http://schemas.microsoft.com/office/drawing/2014/main" id="{0547556D-187F-7DDE-25D4-BBFC62D769DE}"/>
+              </a:ext>
+            </a:extLst>
+          </p:cNvPr>
+          <p:cNvPicPr preferRelativeResize="0"/>
+          <p:nvPr/>
+        </p:nvPicPr>
+        <p:blipFill rotWithShape="1">
+          <a:blip r:embed="rId3">
+            <a:alphaModFix/>
+          </a:blip>
+          <a:srcRect/>
+          <a:stretch/>
+        </p:blipFill>
+        <p:spPr>
+          <a:xfrm>
+            <a:off x="11269071" y="102585"/>
+            <a:ext cx="1156713" cy="1156713"/>
+          </a:xfrm>
+          <a:prstGeom prst="rect">
+            <a:avLst/>
+          </a:prstGeom>
+          <a:noFill/>
+          <a:ln w="28575" cap="flat" cmpd="sng">
+            <a:solidFill>
+              <a:schemeClr val="dk1"/>
+            </a:solidFill>
+            <a:prstDash val="solid"/>
+            <a:round/>
+            <a:headEnd type="none" w="sm" len="sm"/>
+            <a:tailEnd type="none" w="sm" len="sm"/>
+          </a:ln>
+        </p:spPr>
+      </p:pic>
+      <p:sp>
+        <p:nvSpPr>
+          <p:cNvPr id="2" name="Google Shape;112;p2">
+            <a:extLst>
+              <a:ext uri="{FF2B5EF4-FFF2-40B4-BE49-F238E27FC236}">
+                <a16:creationId xmlns:a16="http://schemas.microsoft.com/office/drawing/2014/main" id="{5417B05A-0461-ACFE-B7C1-B89159D0050A}"/>
+              </a:ext>
+            </a:extLst>
+          </p:cNvPr>
+          <p:cNvSpPr/>
+          <p:nvPr/>
+        </p:nvSpPr>
+        <p:spPr>
+          <a:xfrm>
+            <a:off x="-6928" y="8409003"/>
+            <a:ext cx="13018657" cy="1358093"/>
+          </a:xfrm>
+          <a:prstGeom prst="rect">
+            <a:avLst/>
+          </a:prstGeom>
+          <a:solidFill>
+            <a:srgbClr val="00A1FF"/>
+          </a:solidFill>
+          <a:ln>
+            <a:noFill/>
+          </a:ln>
+        </p:spPr>
+        <p:txBody>
+          <a:bodyPr spcFirstLastPara="1" wrap="square" lIns="50800" tIns="50800" rIns="50800" bIns="50800" anchor="ctr" anchorCtr="0">
+            <a:noAutofit/>
+          </a:bodyPr>
+          <a:lstStyle/>
+          <a:p>
+            <a:pPr marL="0" marR="0" lvl="0" indent="0" algn="ctr" rtl="0">
+              <a:lnSpc>
+                <a:spcPct val="100000"/>
+              </a:lnSpc>
+              <a:spcBef>
+                <a:spcPts val="0"/>
+              </a:spcBef>
+              <a:spcAft>
+                <a:spcPts val="0"/>
+              </a:spcAft>
+              <a:buNone/>
+            </a:pPr>
+            <a:endParaRPr sz="1800" b="0" i="0" u="none" strike="noStrike" cap="none">
+              <a:solidFill>
+                <a:schemeClr val="dk1"/>
+              </a:solidFill>
+              <a:latin typeface="Arial"/>
+              <a:ea typeface="Arial"/>
+              <a:cs typeface="Arial"/>
+              <a:sym typeface="Arial"/>
+            </a:endParaRPr>
+          </a:p>
+        </p:txBody>
+      </p:sp>
+      <p:sp>
+        <p:nvSpPr>
+          <p:cNvPr id="3" name="Google Shape;115;p2">
+            <a:extLst>
+              <a:ext uri="{FF2B5EF4-FFF2-40B4-BE49-F238E27FC236}">
+                <a16:creationId xmlns:a16="http://schemas.microsoft.com/office/drawing/2014/main" id="{92E67980-99B9-A8FF-D61C-E1001A62882C}"/>
+              </a:ext>
+            </a:extLst>
+          </p:cNvPr>
+          <p:cNvSpPr txBox="1"/>
+          <p:nvPr/>
+        </p:nvSpPr>
+        <p:spPr>
+          <a:xfrm>
+            <a:off x="6338459" y="8538153"/>
+            <a:ext cx="6121690" cy="1099788"/>
+          </a:xfrm>
+          <a:prstGeom prst="rect">
+            <a:avLst/>
+          </a:prstGeom>
+          <a:noFill/>
+          <a:ln>
+            <a:noFill/>
+          </a:ln>
+        </p:spPr>
+        <p:txBody>
+          <a:bodyPr spcFirstLastPara="1" wrap="square" lIns="50800" tIns="50800" rIns="50800" bIns="50800" anchor="ctr" anchorCtr="0">
+            <a:spAutoFit/>
+          </a:bodyPr>
+          <a:lstStyle/>
+          <a:p>
+            <a:pPr marL="0" marR="0" lvl="0" indent="0" algn="r" rtl="0">
+              <a:lnSpc>
+                <a:spcPct val="120000"/>
+              </a:lnSpc>
+              <a:spcBef>
+                <a:spcPts val="0"/>
+              </a:spcBef>
+              <a:spcAft>
+                <a:spcPts val="0"/>
+              </a:spcAft>
+              <a:buNone/>
+            </a:pPr>
+            <a:r>
+              <a:rPr lang="it-IT" sz="1800" b="1" i="0" u="none" strike="noStrike" cap="none" dirty="0" err="1">
+                <a:solidFill>
+                  <a:srgbClr val="FFFFFF"/>
+                </a:solidFill>
+                <a:latin typeface="Arial"/>
+                <a:ea typeface="Arial"/>
+                <a:cs typeface="Arial"/>
+                <a:sym typeface="Arial"/>
+              </a:rPr>
+              <a:t>PlayWise</a:t>
+            </a:r>
+            <a:endParaRPr sz="1800" b="0" i="0" u="none" strike="noStrike" cap="none" dirty="0">
+              <a:solidFill>
+                <a:schemeClr val="dk1"/>
+              </a:solidFill>
+              <a:latin typeface="Arial"/>
+              <a:ea typeface="Arial"/>
+              <a:cs typeface="Arial"/>
+              <a:sym typeface="Arial"/>
+            </a:endParaRPr>
+          </a:p>
+          <a:p>
+            <a:pPr marL="0" marR="0" lvl="0" indent="0" algn="r" rtl="0">
+              <a:lnSpc>
+                <a:spcPct val="120000"/>
+              </a:lnSpc>
+              <a:spcBef>
+                <a:spcPts val="0"/>
+              </a:spcBef>
+              <a:spcAft>
+                <a:spcPts val="0"/>
+              </a:spcAft>
+              <a:buNone/>
+            </a:pPr>
+            <a:r>
+              <a:rPr lang="it-IT" sz="1800" b="1" i="0" u="none" strike="noStrike" cap="none" dirty="0">
+                <a:solidFill>
+                  <a:srgbClr val="FFFFFF"/>
+                </a:solidFill>
+                <a:latin typeface="Arial"/>
+                <a:ea typeface="Arial"/>
+                <a:cs typeface="Arial"/>
+                <a:sym typeface="Arial"/>
+              </a:rPr>
+              <a:t>Francesco Maria Torino</a:t>
+            </a:r>
+            <a:endParaRPr dirty="0"/>
+          </a:p>
+          <a:p>
+            <a:pPr marL="0" marR="0" lvl="0" indent="0" algn="r" rtl="0">
+              <a:lnSpc>
+                <a:spcPct val="120000"/>
+              </a:lnSpc>
+              <a:spcBef>
+                <a:spcPts val="0"/>
+              </a:spcBef>
+              <a:spcAft>
+                <a:spcPts val="0"/>
+              </a:spcAft>
+              <a:buNone/>
+            </a:pPr>
+            <a:r>
+              <a:rPr lang="it-IT" sz="1800" b="1" i="0" u="none" strike="noStrike" cap="none" dirty="0">
+                <a:solidFill>
+                  <a:srgbClr val="FFFFFF"/>
+                </a:solidFill>
+                <a:latin typeface="Arial"/>
+                <a:ea typeface="Arial"/>
+                <a:cs typeface="Arial"/>
+                <a:sym typeface="Arial"/>
+              </a:rPr>
+              <a:t>Progetto  </a:t>
+            </a:r>
+            <a:r>
+              <a:rPr lang="it-IT" sz="1800" b="1" i="0" u="none" strike="noStrike" cap="none" dirty="0" err="1">
+                <a:solidFill>
+                  <a:srgbClr val="FFFFFF"/>
+                </a:solidFill>
+                <a:latin typeface="Arial"/>
+                <a:ea typeface="Arial"/>
+                <a:cs typeface="Arial"/>
+                <a:sym typeface="Arial"/>
+              </a:rPr>
+              <a:t>SwD</a:t>
+            </a:r>
+            <a:endParaRPr sz="1800" b="0" i="0" u="none" strike="noStrike" cap="none" dirty="0">
+              <a:solidFill>
+                <a:schemeClr val="dk1"/>
+              </a:solidFill>
+              <a:latin typeface="Arial"/>
+              <a:ea typeface="Arial"/>
+              <a:cs typeface="Arial"/>
+              <a:sym typeface="Arial"/>
+            </a:endParaRPr>
+          </a:p>
+        </p:txBody>
+      </p:sp>
+      <p:sp>
+        <p:nvSpPr>
+          <p:cNvPr id="5" name="Google Shape;116;p2">
+            <a:extLst>
+              <a:ext uri="{FF2B5EF4-FFF2-40B4-BE49-F238E27FC236}">
+                <a16:creationId xmlns:a16="http://schemas.microsoft.com/office/drawing/2014/main" id="{22359A8D-F71A-516D-EB02-54A46CB21E29}"/>
+              </a:ext>
+            </a:extLst>
+          </p:cNvPr>
+          <p:cNvSpPr txBox="1"/>
+          <p:nvPr/>
+        </p:nvSpPr>
+        <p:spPr>
+          <a:xfrm>
+            <a:off x="983149" y="8841066"/>
+            <a:ext cx="3165600" cy="434991"/>
+          </a:xfrm>
+          <a:prstGeom prst="rect">
+            <a:avLst/>
+          </a:prstGeom>
+          <a:noFill/>
+          <a:ln>
+            <a:noFill/>
+          </a:ln>
+        </p:spPr>
+        <p:txBody>
+          <a:bodyPr spcFirstLastPara="1" wrap="square" lIns="50800" tIns="50800" rIns="50800" bIns="50800" anchor="ctr" anchorCtr="0">
+            <a:spAutoFit/>
+          </a:bodyPr>
+          <a:lstStyle/>
+          <a:p>
+            <a:pPr marL="0" marR="0" lvl="0" indent="0" algn="l" rtl="0">
+              <a:lnSpc>
+                <a:spcPct val="120000"/>
+              </a:lnSpc>
+              <a:spcBef>
+                <a:spcPts val="0"/>
+              </a:spcBef>
+              <a:spcAft>
+                <a:spcPts val="0"/>
+              </a:spcAft>
+              <a:buNone/>
+            </a:pPr>
+            <a:r>
+              <a:rPr lang="it-IT" sz="1800" b="1" i="0" u="sng" strike="noStrike" cap="none">
+                <a:solidFill>
+                  <a:srgbClr val="FFFFFF"/>
+                </a:solidFill>
+                <a:latin typeface="Play"/>
+                <a:ea typeface="Play"/>
+                <a:cs typeface="Play"/>
+                <a:sym typeface="Play"/>
+                <a:hlinkClick r:id="rId4">
+                  <a:extLst>
+                    <a:ext uri="{A12FA001-AC4F-418D-AE19-62706E023703}">
+                      <ahyp:hlinkClr xmlns:ahyp="http://schemas.microsoft.com/office/drawing/2018/hyperlinkcolor" val="tx"/>
+                    </a:ext>
+                  </a:extLst>
+                </a:hlinkClick>
+              </a:rPr>
+              <a:t>f.torino1@studenti.unisa.it</a:t>
+            </a:r>
+            <a:endParaRPr sz="1800" b="0" i="0" u="sng" strike="noStrike" cap="none">
+              <a:solidFill>
+                <a:schemeClr val="dk1"/>
+              </a:solidFill>
+              <a:latin typeface="Arial"/>
+              <a:ea typeface="Arial"/>
+              <a:cs typeface="Arial"/>
+              <a:sym typeface="Arial"/>
+              <a:hlinkClick r:id="rId4">
+                <a:extLst>
+                  <a:ext uri="{A12FA001-AC4F-418D-AE19-62706E023703}">
+                    <ahyp:hlinkClr xmlns:ahyp="http://schemas.microsoft.com/office/drawing/2018/hyperlinkcolor" val="tx"/>
+                  </a:ext>
+                </a:extLst>
+              </a:hlinkClick>
+            </a:endParaRPr>
+          </a:p>
+        </p:txBody>
+      </p:sp>
+      <p:pic>
+        <p:nvPicPr>
+          <p:cNvPr id="6" name="Google Shape;117;p2" descr="email.png">
+            <a:extLst>
+              <a:ext uri="{FF2B5EF4-FFF2-40B4-BE49-F238E27FC236}">
+                <a16:creationId xmlns:a16="http://schemas.microsoft.com/office/drawing/2014/main" id="{E5C22086-87A7-767B-AD41-A4B7E7B65317}"/>
+              </a:ext>
+            </a:extLst>
+          </p:cNvPr>
+          <p:cNvPicPr preferRelativeResize="0"/>
+          <p:nvPr/>
+        </p:nvPicPr>
+        <p:blipFill rotWithShape="1">
+          <a:blip r:embed="rId5">
+            <a:alphaModFix/>
+          </a:blip>
+          <a:srcRect/>
+          <a:stretch/>
+        </p:blipFill>
+        <p:spPr>
+          <a:xfrm>
+            <a:off x="641852" y="8953636"/>
+            <a:ext cx="254001" cy="254001"/>
+          </a:xfrm>
+          <a:prstGeom prst="rect">
+            <a:avLst/>
+          </a:prstGeom>
+          <a:noFill/>
+          <a:ln>
+            <a:noFill/>
+          </a:ln>
+        </p:spPr>
+      </p:pic>
+      <p:pic>
+        <p:nvPicPr>
+          <p:cNvPr id="14" name="Immagine 13" descr="Immagine che contiene testo, schermata, biglietto da visita, Carattere&#10;&#10;Il contenuto generato dall'IA potrebbe non essere corretto.">
+            <a:extLst>
+              <a:ext uri="{FF2B5EF4-FFF2-40B4-BE49-F238E27FC236}">
+                <a16:creationId xmlns:a16="http://schemas.microsoft.com/office/drawing/2014/main" id="{1A20EEB0-92AF-4760-F8A0-DAC1C0B08F98}"/>
+              </a:ext>
+            </a:extLst>
+          </p:cNvPr>
+          <p:cNvPicPr>
+            <a:picLocks noChangeAspect="1"/>
+          </p:cNvPicPr>
+          <p:nvPr/>
+        </p:nvPicPr>
+        <p:blipFill>
+          <a:blip r:embed="rId6"/>
+          <a:stretch>
+            <a:fillRect/>
+          </a:stretch>
+        </p:blipFill>
+        <p:spPr>
+          <a:xfrm>
+            <a:off x="9108789" y="2952805"/>
+            <a:ext cx="3351360" cy="3863373"/>
+          </a:xfrm>
+          <a:prstGeom prst="rect">
+            <a:avLst/>
+          </a:prstGeom>
+        </p:spPr>
+      </p:pic>
+    </p:spTree>
+    <p:extLst>
+      <p:ext uri="{BB962C8B-B14F-4D97-AF65-F5344CB8AC3E}">
+        <p14:creationId xmlns:p14="http://schemas.microsoft.com/office/powerpoint/2010/main" val="3258505563"/>
+      </p:ext>
+    </p:extLst>
+  </p:cSld>
+  <p:clrMapOvr>
+    <a:masterClrMapping/>
+  </p:clrMapOvr>
+  <mc:AlternateContent xmlns:mc="http://schemas.openxmlformats.org/markup-compatibility/2006" xmlns:p159="http://schemas.microsoft.com/office/powerpoint/2015/09/main">
+    <mc:Choice Requires="p159">
+      <p:transition xmlns:p14="http://schemas.microsoft.com/office/powerpoint/2010/main" spd="slow" p14:dur="2000">
+        <p159:morph option="byObject"/>
+      </p:transition>
+    </mc:Choice>
+    <mc:Fallback xmlns="">
+      <p:transition spd="slow">
+        <p:fade/>
+      </p:transition>
+    </mc:Fallback>
+  </mc:AlternateContent>
+</p:sld>
+</file>
+
+<file path=ppt/slides/slide7.xml><?xml version="1.0" encoding="utf-8"?>
 <p:sld xmlns:a="http://schemas.openxmlformats.org/drawingml/2006/main" xmlns:r="http://schemas.openxmlformats.org/officeDocument/2006/relationships" xmlns:p="http://schemas.openxmlformats.org/presentationml/2006/main">
   <p:cSld>
     <p:spTree>
